--- a/Lecture Slides/05 - Programming Beyond the Basics.pptx
+++ b/Lecture Slides/05 - Programming Beyond the Basics.pptx
@@ -445,80 +445,6 @@
           <a:bodyPr/>
           <a:lstStyle/>
           <a:p>
-            <a:r>
-              <a:rPr lang="en-US" b="1" dirty="0"/>
-              <a:t>Topics Covered</a:t>
-            </a:r>
-            <a:r>
-              <a:rPr lang="en-US" dirty="0"/>
-              <a:t>: </a:t>
-            </a:r>
-          </a:p>
-          <a:p>
-            <a:pPr marL="228600" indent="-228600">
-              <a:buFont typeface="+mj-lt"/>
-              <a:buAutoNum type="arabicPeriod"/>
-            </a:pPr>
-            <a:r>
-              <a:rPr lang="en-US" dirty="0"/>
-              <a:t>Pointers and strings in C, </a:t>
-            </a:r>
-          </a:p>
-          <a:p>
-            <a:pPr marL="228600" indent="-228600">
-              <a:buFont typeface="+mj-lt"/>
-              <a:buAutoNum type="arabicPeriod"/>
-            </a:pPr>
-            <a:r>
-              <a:rPr lang="en-US" dirty="0"/>
-              <a:t>dynamic memory allocation, </a:t>
-            </a:r>
-          </a:p>
-          <a:p>
-            <a:pPr marL="228600" indent="-228600">
-              <a:buFont typeface="+mj-lt"/>
-              <a:buAutoNum type="arabicPeriod"/>
-            </a:pPr>
-            <a:r>
-              <a:rPr lang="en-US" dirty="0"/>
-              <a:t>and common bugs like </a:t>
-            </a:r>
-          </a:p>
-          <a:p>
-            <a:pPr marL="628650" lvl="1" indent="-171450">
-              <a:buFont typeface="Arial" panose="020B0604020202020204" pitchFamily="34" charset="0"/>
-              <a:buChar char="•"/>
-            </a:pPr>
-            <a:r>
-              <a:rPr lang="en-US" dirty="0"/>
-              <a:t>null bytes, </a:t>
-            </a:r>
-          </a:p>
-          <a:p>
-            <a:pPr marL="628650" lvl="1" indent="-171450">
-              <a:buFont typeface="Arial" panose="020B0604020202020204" pitchFamily="34" charset="0"/>
-              <a:buChar char="•"/>
-            </a:pPr>
-            <a:r>
-              <a:rPr lang="en-US" dirty="0"/>
-              <a:t>double frees, </a:t>
-            </a:r>
-          </a:p>
-          <a:p>
-            <a:pPr marL="628650" lvl="1" indent="-171450">
-              <a:buFont typeface="Arial" panose="020B0604020202020204" pitchFamily="34" charset="0"/>
-              <a:buChar char="•"/>
-            </a:pPr>
-            <a:r>
-              <a:rPr lang="en-US" dirty="0"/>
-              <a:t>and dangling pointers.</a:t>
-            </a:r>
-          </a:p>
-          <a:p>
-            <a:pPr marL="0" lvl="0" indent="0">
-              <a:buFont typeface="Arial" panose="020B0604020202020204" pitchFamily="34" charset="0"/>
-              <a:buNone/>
-            </a:pPr>
             <a:endParaRPr lang="en-US" dirty="0"/>
           </a:p>
         </p:txBody>
@@ -540,7 +466,7 @@
           <a:p>
             <a:fld id="{47C4BADD-04F7-41D2-9669-C72D2F0F5FAD}" type="slidenum">
               <a:rPr lang="en-US" smtClean="0"/>
-              <a:t>2</a:t>
+              <a:t>1</a:t>
             </a:fld>
             <a:endParaRPr lang="en-US"/>
           </a:p>
@@ -549,7 +475,7 @@
     </p:spTree>
     <p:extLst>
       <p:ext uri="{BB962C8B-B14F-4D97-AF65-F5344CB8AC3E}">
-        <p14:creationId xmlns:p14="http://schemas.microsoft.com/office/powerpoint/2010/main" val="269432044"/>
+        <p14:creationId xmlns:p14="http://schemas.microsoft.com/office/powerpoint/2010/main" val="1100123054"/>
       </p:ext>
     </p:extLst>
   </p:cSld>
@@ -604,7 +530,7 @@
           <a:lstStyle/>
           <a:p>
             <a:r>
-              <a:rPr lang="en-US" sz="1200" b="1" kern="1200" dirty="0" err="1">
+              <a:rPr lang="en-US" sz="1200" b="1" kern="1200" dirty="0">
                 <a:solidFill>
                   <a:schemeClr val="tx1"/>
                 </a:solidFill>
@@ -612,22 +538,11 @@
                 <a:ea typeface="+mn-ea"/>
                 <a:cs typeface="+mn-cs"/>
               </a:rPr>
-              <a:t>calloc</a:t>
-            </a:r>
-            <a:r>
-              <a:rPr lang="en-US" sz="1200" b="1" kern="1200" dirty="0">
-                <a:solidFill>
-                  <a:schemeClr val="tx1"/>
-                </a:solidFill>
-                <a:latin typeface="+mn-lt"/>
-                <a:ea typeface="+mn-ea"/>
-                <a:cs typeface="+mn-cs"/>
-              </a:rPr>
-              <a:t>()</a:t>
+              <a:t>malloc()</a:t>
             </a:r>
             <a:r>
               <a:rPr lang="en-US" dirty="0"/>
-              <a:t>: An alternative allocation method often used for arrays.</a:t>
+              <a:t>: Allocates a specific number of bytes.</a:t>
             </a:r>
           </a:p>
         </p:txBody>
@@ -649,7 +564,7 @@
           <a:p>
             <a:fld id="{47C4BADD-04F7-41D2-9669-C72D2F0F5FAD}" type="slidenum">
               <a:rPr lang="en-US" smtClean="0"/>
-              <a:t>11</a:t>
+              <a:t>10</a:t>
             </a:fld>
             <a:endParaRPr lang="en-US"/>
           </a:p>
@@ -658,7 +573,7 @@
     </p:spTree>
     <p:extLst>
       <p:ext uri="{BB962C8B-B14F-4D97-AF65-F5344CB8AC3E}">
-        <p14:creationId xmlns:p14="http://schemas.microsoft.com/office/powerpoint/2010/main" val="2645945147"/>
+        <p14:creationId xmlns:p14="http://schemas.microsoft.com/office/powerpoint/2010/main" val="671057026"/>
       </p:ext>
     </p:extLst>
   </p:cSld>
@@ -713,7 +628,7 @@
           <a:lstStyle/>
           <a:p>
             <a:r>
-              <a:rPr lang="en-US" sz="1200" b="1" kern="1200" dirty="0">
+              <a:rPr lang="en-US" sz="1200" b="1" kern="1200" dirty="0" err="1">
                 <a:solidFill>
                   <a:schemeClr val="tx1"/>
                 </a:solidFill>
@@ -721,10 +636,10 @@
                 <a:ea typeface="+mn-ea"/>
                 <a:cs typeface="+mn-cs"/>
               </a:rPr>
-              <a:t>free()</a:t>
-            </a:r>
-            <a:r>
-              <a:rPr lang="en-US" sz="1200" b="0" kern="1200" dirty="0">
+              <a:t>calloc</a:t>
+            </a:r>
+            <a:r>
+              <a:rPr lang="en-US" sz="1200" b="1" kern="1200" dirty="0">
                 <a:solidFill>
                   <a:schemeClr val="tx1"/>
                 </a:solidFill>
@@ -732,26 +647,12 @@
                 <a:ea typeface="+mn-ea"/>
                 <a:cs typeface="+mn-cs"/>
               </a:rPr>
-              <a:t>:</a:t>
-            </a:r>
-            <a:r>
-              <a:rPr lang="en-US" sz="1200" b="1" kern="1200" dirty="0">
-                <a:solidFill>
-                  <a:schemeClr val="tx1"/>
-                </a:solidFill>
-                <a:latin typeface="+mn-lt"/>
-                <a:ea typeface="+mn-ea"/>
-                <a:cs typeface="+mn-cs"/>
-              </a:rPr>
-              <a:t> </a:t>
+              <a:t>()</a:t>
             </a:r>
             <a:r>
               <a:rPr lang="en-US" dirty="0"/>
-              <a:t>Releases previously allocated dynamic memory back to the system.</a:t>
-            </a:r>
-          </a:p>
-          <a:p>
-            <a:endParaRPr lang="en-US" dirty="0"/>
+              <a:t>: An alternative allocation method often used for arrays.</a:t>
+            </a:r>
           </a:p>
         </p:txBody>
       </p:sp>
@@ -772,7 +673,7 @@
           <a:p>
             <a:fld id="{47C4BADD-04F7-41D2-9669-C72D2F0F5FAD}" type="slidenum">
               <a:rPr lang="en-US" smtClean="0"/>
-              <a:t>12</a:t>
+              <a:t>11</a:t>
             </a:fld>
             <a:endParaRPr lang="en-US"/>
           </a:p>
@@ -781,7 +682,7 @@
     </p:spTree>
     <p:extLst>
       <p:ext uri="{BB962C8B-B14F-4D97-AF65-F5344CB8AC3E}">
-        <p14:creationId xmlns:p14="http://schemas.microsoft.com/office/powerpoint/2010/main" val="2442514892"/>
+        <p14:creationId xmlns:p14="http://schemas.microsoft.com/office/powerpoint/2010/main" val="2645945147"/>
       </p:ext>
     </p:extLst>
   </p:cSld>
@@ -836,7 +737,7 @@
           <a:lstStyle/>
           <a:p>
             <a:r>
-              <a:rPr lang="en-US" sz="1200" b="1" kern="1200" dirty="0" err="1">
+              <a:rPr lang="en-US" sz="1200" b="1" kern="1200" dirty="0">
                 <a:solidFill>
                   <a:schemeClr val="tx1"/>
                 </a:solidFill>
@@ -844,10 +745,10 @@
                 <a:ea typeface="+mn-ea"/>
                 <a:cs typeface="+mn-cs"/>
               </a:rPr>
-              <a:t>realloc</a:t>
-            </a:r>
-            <a:r>
-              <a:rPr lang="en-US" sz="1200" b="1" kern="1200" dirty="0">
+              <a:t>free()</a:t>
+            </a:r>
+            <a:r>
+              <a:rPr lang="en-US" sz="1200" b="0" kern="1200" dirty="0">
                 <a:solidFill>
                   <a:schemeClr val="tx1"/>
                 </a:solidFill>
@@ -855,11 +756,22 @@
                 <a:ea typeface="+mn-ea"/>
                 <a:cs typeface="+mn-cs"/>
               </a:rPr>
-              <a:t>()</a:t>
+              <a:t>:</a:t>
+            </a:r>
+            <a:r>
+              <a:rPr lang="en-US" sz="1200" b="1" kern="1200" dirty="0">
+                <a:solidFill>
+                  <a:schemeClr val="tx1"/>
+                </a:solidFill>
+                <a:latin typeface="+mn-lt"/>
+                <a:ea typeface="+mn-ea"/>
+                <a:cs typeface="+mn-cs"/>
+              </a:rPr>
+              <a:t> </a:t>
             </a:r>
             <a:r>
               <a:rPr lang="en-US" dirty="0"/>
-              <a:t>: Used to resize previously allocated memory blocks.</a:t>
+              <a:t>Releases previously allocated dynamic memory back to the system.</a:t>
             </a:r>
           </a:p>
           <a:p>
@@ -884,7 +796,7 @@
           <a:p>
             <a:fld id="{47C4BADD-04F7-41D2-9669-C72D2F0F5FAD}" type="slidenum">
               <a:rPr lang="en-US" smtClean="0"/>
-              <a:t>13</a:t>
+              <a:t>12</a:t>
             </a:fld>
             <a:endParaRPr lang="en-US"/>
           </a:p>
@@ -893,7 +805,7 @@
     </p:spTree>
     <p:extLst>
       <p:ext uri="{BB962C8B-B14F-4D97-AF65-F5344CB8AC3E}">
-        <p14:creationId xmlns:p14="http://schemas.microsoft.com/office/powerpoint/2010/main" val="2452252758"/>
+        <p14:creationId xmlns:p14="http://schemas.microsoft.com/office/powerpoint/2010/main" val="2442514892"/>
       </p:ext>
     </p:extLst>
   </p:cSld>
@@ -948,12 +860,30 @@
           <a:lstStyle/>
           <a:p>
             <a:r>
-              <a:rPr lang="en-US" b="1" dirty="0"/>
-              <a:t>Summary</a:t>
+              <a:rPr lang="en-US" sz="1200" b="1" kern="1200" dirty="0" err="1">
+                <a:solidFill>
+                  <a:schemeClr val="tx1"/>
+                </a:solidFill>
+                <a:latin typeface="+mn-lt"/>
+                <a:ea typeface="+mn-ea"/>
+                <a:cs typeface="+mn-cs"/>
+              </a:rPr>
+              <a:t>realloc</a:t>
+            </a:r>
+            <a:r>
+              <a:rPr lang="en-US" sz="1200" b="1" kern="1200" dirty="0">
+                <a:solidFill>
+                  <a:schemeClr val="tx1"/>
+                </a:solidFill>
+                <a:latin typeface="+mn-lt"/>
+                <a:ea typeface="+mn-ea"/>
+                <a:cs typeface="+mn-cs"/>
+              </a:rPr>
+              <a:t>()</a:t>
             </a:r>
             <a:r>
               <a:rPr lang="en-US" dirty="0"/>
-              <a:t>: Re-emphasizes that programmers are responsible for explicit memory management in C/C++.</a:t>
+              <a:t>: Used to resize previously allocated memory blocks.</a:t>
             </a:r>
           </a:p>
           <a:p>
@@ -978,7 +908,7 @@
           <a:p>
             <a:fld id="{47C4BADD-04F7-41D2-9669-C72D2F0F5FAD}" type="slidenum">
               <a:rPr lang="en-US" smtClean="0"/>
-              <a:t>14</a:t>
+              <a:t>13</a:t>
             </a:fld>
             <a:endParaRPr lang="en-US"/>
           </a:p>
@@ -987,7 +917,7 @@
     </p:spTree>
     <p:extLst>
       <p:ext uri="{BB962C8B-B14F-4D97-AF65-F5344CB8AC3E}">
-        <p14:creationId xmlns:p14="http://schemas.microsoft.com/office/powerpoint/2010/main" val="4231861253"/>
+        <p14:creationId xmlns:p14="http://schemas.microsoft.com/office/powerpoint/2010/main" val="2452252758"/>
       </p:ext>
     </p:extLst>
   </p:cSld>
@@ -1043,62 +973,12 @@
           <a:p>
             <a:r>
               <a:rPr lang="en-US" b="1" dirty="0"/>
-              <a:t>Common Bugs - Double Frees</a:t>
-            </a:r>
-          </a:p>
-          <a:p>
-            <a:endParaRPr lang="en-US" dirty="0"/>
-          </a:p>
-          <a:p>
-            <a:r>
-              <a:rPr lang="en-US" b="1" dirty="0"/>
-              <a:t>Definition</a:t>
+              <a:t>Summary</a:t>
             </a:r>
             <a:r>
               <a:rPr lang="en-US" dirty="0"/>
-              <a:t>: </a:t>
-            </a:r>
-          </a:p>
-          <a:p>
-            <a:r>
-              <a:rPr lang="en-US" dirty="0"/>
-              <a:t>Occurs when a program tries to free the same memory block more than once.</a:t>
-            </a:r>
-          </a:p>
-          <a:p>
-            <a:endParaRPr lang="en-US" dirty="0"/>
-          </a:p>
-          <a:p>
-            <a:r>
-              <a:rPr lang="en-US" b="1" dirty="0"/>
-              <a:t>Consequences</a:t>
-            </a:r>
-            <a:r>
-              <a:rPr lang="en-US" dirty="0"/>
-              <a:t>: </a:t>
-            </a:r>
-          </a:p>
-          <a:p>
-            <a:r>
-              <a:rPr lang="en-US" dirty="0"/>
-              <a:t>Leads to memory corruption and crashes.</a:t>
-            </a:r>
-          </a:p>
-          <a:p>
-            <a:endParaRPr lang="en-US" dirty="0"/>
-          </a:p>
-          <a:p>
-            <a:r>
-              <a:rPr lang="en-US" b="1" dirty="0"/>
-              <a:t>See example:</a:t>
-            </a:r>
-          </a:p>
-          <a:p>
-            <a:r>
-              <a:rPr lang="en-US" dirty="0" err="1"/>
-              <a:t>double_frees.c</a:t>
-            </a:r>
-            <a:endParaRPr lang="en-US" dirty="0"/>
+              <a:t>: Re-emphasizes that programmers are responsible for explicit memory management in C/C++.</a:t>
+            </a:r>
           </a:p>
           <a:p>
             <a:endParaRPr lang="en-US" dirty="0"/>
@@ -1122,7 +1002,7 @@
           <a:p>
             <a:fld id="{47C4BADD-04F7-41D2-9669-C72D2F0F5FAD}" type="slidenum">
               <a:rPr lang="en-US" smtClean="0"/>
-              <a:t>15</a:t>
+              <a:t>14</a:t>
             </a:fld>
             <a:endParaRPr lang="en-US"/>
           </a:p>
@@ -1131,7 +1011,7 @@
     </p:spTree>
     <p:extLst>
       <p:ext uri="{BB962C8B-B14F-4D97-AF65-F5344CB8AC3E}">
-        <p14:creationId xmlns:p14="http://schemas.microsoft.com/office/powerpoint/2010/main" val="3783215225"/>
+        <p14:creationId xmlns:p14="http://schemas.microsoft.com/office/powerpoint/2010/main" val="4231861253"/>
       </p:ext>
     </p:extLst>
   </p:cSld>
@@ -1187,7 +1067,7 @@
           <a:p>
             <a:r>
               <a:rPr lang="en-US" b="1" dirty="0"/>
-              <a:t>Dangling Pointers</a:t>
+              <a:t>Common Bugs - Double Frees</a:t>
             </a:r>
           </a:p>
           <a:p>
@@ -1206,7 +1086,7 @@
           <a:p>
             <a:r>
               <a:rPr lang="en-US" dirty="0"/>
-              <a:t>A pointer that still holds a memory address after that memory has been freed.</a:t>
+              <a:t>Occurs when a program tries to free the same memory block more than once.</a:t>
             </a:r>
           </a:p>
           <a:p>
@@ -1215,7 +1095,7 @@
           <a:p>
             <a:r>
               <a:rPr lang="en-US" b="1" dirty="0"/>
-              <a:t>Risk</a:t>
+              <a:t>Consequences</a:t>
             </a:r>
             <a:r>
               <a:rPr lang="en-US" dirty="0"/>
@@ -1225,8 +1105,24 @@
           <a:p>
             <a:r>
               <a:rPr lang="en-US" dirty="0"/>
-              <a:t>Accessing it leads to undefined behavior.</a:t>
-            </a:r>
+              <a:t>Leads to memory corruption and crashes.</a:t>
+            </a:r>
+          </a:p>
+          <a:p>
+            <a:endParaRPr lang="en-US" dirty="0"/>
+          </a:p>
+          <a:p>
+            <a:r>
+              <a:rPr lang="en-US" b="1" dirty="0"/>
+              <a:t>See example:</a:t>
+            </a:r>
+          </a:p>
+          <a:p>
+            <a:r>
+              <a:rPr lang="en-US" dirty="0" err="1"/>
+              <a:t>double_frees.c</a:t>
+            </a:r>
+            <a:endParaRPr lang="en-US" dirty="0"/>
           </a:p>
           <a:p>
             <a:endParaRPr lang="en-US" dirty="0"/>
@@ -1250,6 +1146,134 @@
           <a:p>
             <a:fld id="{47C4BADD-04F7-41D2-9669-C72D2F0F5FAD}" type="slidenum">
               <a:rPr lang="en-US" smtClean="0"/>
+              <a:t>15</a:t>
+            </a:fld>
+            <a:endParaRPr lang="en-US"/>
+          </a:p>
+        </p:txBody>
+      </p:sp>
+    </p:spTree>
+    <p:extLst>
+      <p:ext uri="{BB962C8B-B14F-4D97-AF65-F5344CB8AC3E}">
+        <p14:creationId xmlns:p14="http://schemas.microsoft.com/office/powerpoint/2010/main" val="3783215225"/>
+      </p:ext>
+    </p:extLst>
+  </p:cSld>
+  <p:clrMapOvr>
+    <a:masterClrMapping/>
+  </p:clrMapOvr>
+</p:notes>
+</file>
+
+<file path=ppt/notesSlides/notesSlide16.xml><?xml version="1.0" encoding="utf-8"?>
+<p:notes xmlns:a="http://schemas.openxmlformats.org/drawingml/2006/main" xmlns:r="http://schemas.openxmlformats.org/officeDocument/2006/relationships" xmlns:p="http://schemas.openxmlformats.org/presentationml/2006/main">
+  <p:cSld>
+    <p:spTree>
+      <p:nvGrpSpPr>
+        <p:cNvPr id="1" name=""/>
+        <p:cNvGrpSpPr/>
+        <p:nvPr/>
+      </p:nvGrpSpPr>
+      <p:grpSpPr>
+        <a:xfrm>
+          <a:off x="0" y="0"/>
+          <a:ext cx="0" cy="0"/>
+          <a:chOff x="0" y="0"/>
+          <a:chExt cx="0" cy="0"/>
+        </a:xfrm>
+      </p:grpSpPr>
+      <p:sp>
+        <p:nvSpPr>
+          <p:cNvPr id="2" name="Slide Image Placeholder 1"/>
+          <p:cNvSpPr>
+            <a:spLocks noGrp="1" noRot="1" noChangeAspect="1"/>
+          </p:cNvSpPr>
+          <p:nvPr>
+            <p:ph type="sldImg"/>
+          </p:nvPr>
+        </p:nvSpPr>
+        <p:spPr/>
+      </p:sp>
+      <p:sp>
+        <p:nvSpPr>
+          <p:cNvPr id="3" name="Notes Placeholder 2"/>
+          <p:cNvSpPr>
+            <a:spLocks noGrp="1"/>
+          </p:cNvSpPr>
+          <p:nvPr>
+            <p:ph type="body" idx="1"/>
+          </p:nvPr>
+        </p:nvSpPr>
+        <p:spPr/>
+        <p:txBody>
+          <a:bodyPr/>
+          <a:lstStyle/>
+          <a:p>
+            <a:r>
+              <a:rPr lang="en-US" b="1" dirty="0"/>
+              <a:t>Dangling Pointers</a:t>
+            </a:r>
+          </a:p>
+          <a:p>
+            <a:endParaRPr lang="en-US" dirty="0"/>
+          </a:p>
+          <a:p>
+            <a:r>
+              <a:rPr lang="en-US" b="1" dirty="0"/>
+              <a:t>Definition</a:t>
+            </a:r>
+            <a:r>
+              <a:rPr lang="en-US" dirty="0"/>
+              <a:t>: </a:t>
+            </a:r>
+          </a:p>
+          <a:p>
+            <a:r>
+              <a:rPr lang="en-US" dirty="0"/>
+              <a:t>A pointer that still holds a memory address after that memory has been freed.</a:t>
+            </a:r>
+          </a:p>
+          <a:p>
+            <a:endParaRPr lang="en-US" dirty="0"/>
+          </a:p>
+          <a:p>
+            <a:r>
+              <a:rPr lang="en-US" b="1" dirty="0"/>
+              <a:t>Risk</a:t>
+            </a:r>
+            <a:r>
+              <a:rPr lang="en-US" dirty="0"/>
+              <a:t>: </a:t>
+            </a:r>
+          </a:p>
+          <a:p>
+            <a:r>
+              <a:rPr lang="en-US" dirty="0"/>
+              <a:t>Accessing it leads to undefined behavior.</a:t>
+            </a:r>
+          </a:p>
+          <a:p>
+            <a:endParaRPr lang="en-US" dirty="0"/>
+          </a:p>
+        </p:txBody>
+      </p:sp>
+      <p:sp>
+        <p:nvSpPr>
+          <p:cNvPr id="4" name="Slide Number Placeholder 3"/>
+          <p:cNvSpPr>
+            <a:spLocks noGrp="1"/>
+          </p:cNvSpPr>
+          <p:nvPr>
+            <p:ph type="sldNum" sz="quarter" idx="5"/>
+          </p:nvPr>
+        </p:nvSpPr>
+        <p:spPr/>
+        <p:txBody>
+          <a:bodyPr/>
+          <a:lstStyle/>
+          <a:p>
+            <a:fld id="{47C4BADD-04F7-41D2-9669-C72D2F0F5FAD}" type="slidenum">
+              <a:rPr lang="en-US" smtClean="0"/>
               <a:t>16</a:t>
             </a:fld>
             <a:endParaRPr lang="en-US"/>
@@ -1269,7 +1293,7 @@
 </p:notes>
 </file>
 
-<file path=ppt/notesSlides/notesSlide16.xml><?xml version="1.0" encoding="utf-8"?>
+<file path=ppt/notesSlides/notesSlide17.xml><?xml version="1.0" encoding="utf-8"?>
 <p:notes xmlns:a="http://schemas.openxmlformats.org/drawingml/2006/main" xmlns:r="http://schemas.openxmlformats.org/officeDocument/2006/relationships" xmlns:p="http://schemas.openxmlformats.org/presentationml/2006/main">
   <p:cSld>
     <p:spTree>
@@ -1467,16 +1491,7 @@
           <a:p>
             <a:r>
               <a:rPr lang="en-US" b="1" dirty="0"/>
-              <a:t>Pointers in C</a:t>
-            </a:r>
-          </a:p>
-          <a:p>
-            <a:endParaRPr lang="en-US" dirty="0"/>
-          </a:p>
-          <a:p>
-            <a:r>
-              <a:rPr lang="en-US" b="1" dirty="0"/>
-              <a:t>Definition</a:t>
+              <a:t>Topics Covered</a:t>
             </a:r>
             <a:r>
               <a:rPr lang="en-US" dirty="0"/>
@@ -1484,46 +1499,70 @@
             </a:r>
           </a:p>
           <a:p>
+            <a:pPr marL="228600" indent="-228600">
+              <a:buFont typeface="+mj-lt"/>
+              <a:buAutoNum type="arabicPeriod"/>
+            </a:pPr>
             <a:r>
               <a:rPr lang="en-US" dirty="0"/>
-              <a:t>A pointer is a variable that stores the memory address of another variable.</a:t>
-            </a:r>
-          </a:p>
-          <a:p>
-            <a:endParaRPr lang="en-US" dirty="0"/>
-          </a:p>
-          <a:p>
-            <a:r>
-              <a:rPr lang="en-US" b="1" dirty="0"/>
-              <a:t>Function</a:t>
-            </a:r>
+              <a:t>Pointers and strings in C, </a:t>
+            </a:r>
+          </a:p>
+          <a:p>
+            <a:pPr marL="228600" indent="-228600">
+              <a:buFont typeface="+mj-lt"/>
+              <a:buAutoNum type="arabicPeriod"/>
+            </a:pPr>
             <a:r>
               <a:rPr lang="en-US" dirty="0"/>
-              <a:t>: </a:t>
-            </a:r>
-          </a:p>
-          <a:p>
+              <a:t>dynamic memory allocation, </a:t>
+            </a:r>
+          </a:p>
+          <a:p>
+            <a:pPr marL="228600" indent="-228600">
+              <a:buFont typeface="+mj-lt"/>
+              <a:buAutoNum type="arabicPeriod"/>
+            </a:pPr>
             <a:r>
               <a:rPr lang="en-US" dirty="0"/>
-              <a:t>They allow direct memory manipulation, which is a powerful feature in C/C++.</a:t>
-            </a:r>
-          </a:p>
-          <a:p>
-            <a:endParaRPr lang="en-US" b="1" dirty="0"/>
-          </a:p>
-          <a:p>
-            <a:r>
-              <a:rPr lang="en-US" b="1" dirty="0"/>
-              <a:t>Memory</a:t>
-            </a:r>
-          </a:p>
-          <a:p>
+              <a:t>and common bugs like </a:t>
+            </a:r>
+          </a:p>
+          <a:p>
+            <a:pPr marL="628650" lvl="1" indent="-171450">
+              <a:buFont typeface="Arial" panose="020B0604020202020204" pitchFamily="34" charset="0"/>
+              <a:buChar char="•"/>
+            </a:pPr>
             <a:r>
               <a:rPr lang="en-US" dirty="0"/>
-              <a:t>Every memory location has a unique address and holds content, often represented as hexadecimal byte values.</a:t>
-            </a:r>
-          </a:p>
-          <a:p>
+              <a:t>null bytes, </a:t>
+            </a:r>
+          </a:p>
+          <a:p>
+            <a:pPr marL="628650" lvl="1" indent="-171450">
+              <a:buFont typeface="Arial" panose="020B0604020202020204" pitchFamily="34" charset="0"/>
+              <a:buChar char="•"/>
+            </a:pPr>
+            <a:r>
+              <a:rPr lang="en-US" dirty="0"/>
+              <a:t>double frees, </a:t>
+            </a:r>
+          </a:p>
+          <a:p>
+            <a:pPr marL="628650" lvl="1" indent="-171450">
+              <a:buFont typeface="Arial" panose="020B0604020202020204" pitchFamily="34" charset="0"/>
+              <a:buChar char="•"/>
+            </a:pPr>
+            <a:r>
+              <a:rPr lang="en-US" dirty="0"/>
+              <a:t>and dangling pointers.</a:t>
+            </a:r>
+          </a:p>
+          <a:p>
+            <a:pPr marL="0" lvl="0" indent="0">
+              <a:buFont typeface="Arial" panose="020B0604020202020204" pitchFamily="34" charset="0"/>
+              <a:buNone/>
+            </a:pPr>
             <a:endParaRPr lang="en-US" dirty="0"/>
           </a:p>
         </p:txBody>
@@ -1545,7 +1584,7 @@
           <a:p>
             <a:fld id="{47C4BADD-04F7-41D2-9669-C72D2F0F5FAD}" type="slidenum">
               <a:rPr lang="en-US" smtClean="0"/>
-              <a:t>3</a:t>
+              <a:t>2</a:t>
             </a:fld>
             <a:endParaRPr lang="en-US"/>
           </a:p>
@@ -1554,7 +1593,7 @@
     </p:spTree>
     <p:extLst>
       <p:ext uri="{BB962C8B-B14F-4D97-AF65-F5344CB8AC3E}">
-        <p14:creationId xmlns:p14="http://schemas.microsoft.com/office/powerpoint/2010/main" val="1140512018"/>
+        <p14:creationId xmlns:p14="http://schemas.microsoft.com/office/powerpoint/2010/main" val="269432044"/>
       </p:ext>
     </p:extLst>
   </p:cSld>
@@ -1608,410 +1647,62 @@
           <a:bodyPr/>
           <a:lstStyle/>
           <a:p>
-            <a:pPr marL="0" marR="0" lvl="0" indent="0" algn="l" defTabSz="914400" rtl="0" eaLnBrk="1" fontAlgn="auto" latinLnBrk="0" hangingPunct="1">
-              <a:lnSpc>
-                <a:spcPct val="100000"/>
-              </a:lnSpc>
-              <a:spcBef>
-                <a:spcPts val="0"/>
-              </a:spcBef>
-              <a:spcAft>
-                <a:spcPts val="0"/>
-              </a:spcAft>
-              <a:buClrTx/>
-              <a:buSzTx/>
-              <a:buFontTx/>
-              <a:buNone/>
-              <a:tabLst/>
-              <a:defRPr/>
-            </a:pPr>
             <a:r>
               <a:rPr lang="en-US" b="1" dirty="0"/>
               <a:t>Pointers in C</a:t>
             </a:r>
           </a:p>
           <a:p>
-            <a:endParaRPr lang="en-US" b="1" dirty="0"/>
+            <a:endParaRPr lang="en-US" dirty="0"/>
           </a:p>
           <a:p>
             <a:r>
               <a:rPr lang="en-US" b="1" dirty="0"/>
-              <a:t>Variable Value</a:t>
-            </a:r>
-            <a:r>
-              <a:rPr lang="en-US" dirty="0"/>
-              <a:t>: Accessed via the variable name (</a:t>
-            </a:r>
-            <a:r>
-              <a:rPr lang="en-US" sz="1200" kern="1200" dirty="0">
-                <a:solidFill>
-                  <a:schemeClr val="tx1"/>
-                </a:solidFill>
-                <a:latin typeface="+mn-lt"/>
-                <a:ea typeface="+mn-ea"/>
-                <a:cs typeface="+mn-cs"/>
-              </a:rPr>
-              <a:t>var</a:t>
-            </a:r>
-            <a:r>
-              <a:rPr lang="en-US" dirty="0"/>
-              <a:t>).</a:t>
-            </a:r>
-          </a:p>
-          <a:p>
-            <a:r>
-              <a:rPr lang="en-US" b="1" dirty="0"/>
-              <a:t>Address of Variable</a:t>
-            </a:r>
-            <a:r>
-              <a:rPr lang="en-US" dirty="0"/>
-              <a:t>: Obtained using the address-of operator (</a:t>
-            </a:r>
-            <a:r>
-              <a:rPr lang="en-US" sz="1200" kern="1200" dirty="0">
-                <a:solidFill>
-                  <a:schemeClr val="tx1"/>
-                </a:solidFill>
-                <a:latin typeface="+mn-lt"/>
-                <a:ea typeface="+mn-ea"/>
-                <a:cs typeface="+mn-cs"/>
-              </a:rPr>
-              <a:t>&amp;var</a:t>
-            </a:r>
-            <a:r>
-              <a:rPr lang="en-US" dirty="0"/>
-              <a:t>).</a:t>
-            </a:r>
-          </a:p>
-          <a:p>
-            <a:r>
-              <a:rPr lang="en-US" b="1" dirty="0"/>
-              <a:t>Pointer Assignment</a:t>
-            </a:r>
-            <a:r>
-              <a:rPr lang="en-US" dirty="0"/>
-              <a:t>: A pointer is assigned an address using </a:t>
-            </a:r>
-            <a:r>
-              <a:rPr lang="en-US" sz="1200" kern="1200" dirty="0">
-                <a:solidFill>
-                  <a:schemeClr val="tx1"/>
-                </a:solidFill>
-                <a:latin typeface="+mn-lt"/>
-                <a:ea typeface="+mn-ea"/>
-                <a:cs typeface="+mn-cs"/>
-              </a:rPr>
-              <a:t>*</a:t>
-            </a:r>
-            <a:r>
-              <a:rPr lang="en-US" sz="1200" kern="1200" dirty="0" err="1">
-                <a:solidFill>
-                  <a:schemeClr val="tx1"/>
-                </a:solidFill>
-                <a:latin typeface="+mn-lt"/>
-                <a:ea typeface="+mn-ea"/>
-                <a:cs typeface="+mn-cs"/>
-              </a:rPr>
-              <a:t>pointerVar</a:t>
-            </a:r>
-            <a:r>
-              <a:rPr lang="en-US" sz="1200" kern="1200" dirty="0">
-                <a:solidFill>
-                  <a:schemeClr val="tx1"/>
-                </a:solidFill>
-                <a:latin typeface="+mn-lt"/>
-                <a:ea typeface="+mn-ea"/>
-                <a:cs typeface="+mn-cs"/>
-              </a:rPr>
-              <a:t> = &amp;var</a:t>
-            </a:r>
-            <a:r>
-              <a:rPr lang="en-US" dirty="0"/>
-              <a:t>.</a:t>
-            </a:r>
-          </a:p>
-          <a:p>
-            <a:r>
-              <a:rPr lang="en-US" b="1" dirty="0"/>
-              <a:t>Dereferencing</a:t>
+              <a:t>Definition</a:t>
             </a:r>
             <a:r>
               <a:rPr lang="en-US" dirty="0"/>
               <a:t>: </a:t>
             </a:r>
-            <a:r>
-              <a:rPr lang="en-US" sz="1200" kern="1200" dirty="0">
-                <a:solidFill>
-                  <a:schemeClr val="tx1"/>
-                </a:solidFill>
-                <a:latin typeface="+mn-lt"/>
-                <a:ea typeface="+mn-ea"/>
-                <a:cs typeface="+mn-cs"/>
-              </a:rPr>
-              <a:t>*</a:t>
-            </a:r>
-            <a:r>
-              <a:rPr lang="en-US" sz="1200" kern="1200" dirty="0" err="1">
-                <a:solidFill>
-                  <a:schemeClr val="tx1"/>
-                </a:solidFill>
-                <a:latin typeface="+mn-lt"/>
-                <a:ea typeface="+mn-ea"/>
-                <a:cs typeface="+mn-cs"/>
-              </a:rPr>
-              <a:t>pointerVar</a:t>
-            </a:r>
+          </a:p>
+          <a:p>
             <a:r>
               <a:rPr lang="en-US" dirty="0"/>
-              <a:t> retrieves the value stored at the address.</a:t>
-            </a:r>
+              <a:t>A pointer is a variable that stores the memory address of another variable.</a:t>
+            </a:r>
+          </a:p>
+          <a:p>
+            <a:endParaRPr lang="en-US" dirty="0"/>
           </a:p>
           <a:p>
             <a:r>
               <a:rPr lang="en-US" b="1" dirty="0"/>
-              <a:t>Stored Address</a:t>
+              <a:t>Function</a:t>
             </a:r>
             <a:r>
               <a:rPr lang="en-US" dirty="0"/>
               <a:t>: </a:t>
             </a:r>
-            <a:r>
-              <a:rPr lang="en-US" sz="1200" kern="1200" dirty="0" err="1">
-                <a:solidFill>
-                  <a:schemeClr val="tx1"/>
-                </a:solidFill>
-                <a:latin typeface="+mn-lt"/>
-                <a:ea typeface="+mn-ea"/>
-                <a:cs typeface="+mn-cs"/>
-              </a:rPr>
-              <a:t>pointerVar</a:t>
-            </a:r>
+          </a:p>
+          <a:p>
             <a:r>
               <a:rPr lang="en-US" dirty="0"/>
-              <a:t> displays the actual address stored in the pointer.</a:t>
-            </a:r>
-          </a:p>
-          <a:p>
-            <a:endParaRPr lang="en-US" dirty="0"/>
+              <a:t>They allow direct memory manipulation, which is a powerful feature in C/C++.</a:t>
+            </a:r>
+          </a:p>
+          <a:p>
+            <a:endParaRPr lang="en-US" b="1" dirty="0"/>
           </a:p>
           <a:p>
             <a:r>
               <a:rPr lang="en-US" b="1" dirty="0"/>
-              <a:t>See example:</a:t>
-            </a:r>
-          </a:p>
-          <a:p>
-            <a:r>
-              <a:rPr lang="en-US" dirty="0" err="1"/>
-              <a:t>pointer_intro.c</a:t>
-            </a:r>
-            <a:endParaRPr lang="en-US" dirty="0"/>
-          </a:p>
-          <a:p>
-            <a:endParaRPr lang="en-US" dirty="0"/>
-          </a:p>
-          <a:p>
-            <a:endParaRPr lang="en-US" dirty="0"/>
+              <a:t>Memory</a:t>
+            </a:r>
           </a:p>
           <a:p>
             <a:r>
               <a:rPr lang="en-US" dirty="0"/>
-              <a:t>---</a:t>
-            </a:r>
-          </a:p>
-          <a:p>
-            <a:r>
-              <a:rPr lang="en-US" b="1" dirty="0"/>
-              <a:t>Long-form Description:</a:t>
-            </a:r>
-          </a:p>
-          <a:p>
-            <a:endParaRPr lang="en-US" dirty="0"/>
-          </a:p>
-          <a:p>
-            <a:r>
-              <a:rPr lang="en-US" b="1" dirty="0"/>
-              <a:t>Basic Pointer Declaration</a:t>
-            </a:r>
-          </a:p>
-          <a:p>
-            <a:r>
-              <a:rPr lang="en-US" dirty="0"/>
-              <a:t>The image demonstrates the fundamental relationship between a variable and its pointer.</a:t>
-            </a:r>
-          </a:p>
-          <a:p>
-            <a:endParaRPr lang="en-US" dirty="0"/>
-          </a:p>
-          <a:p>
-            <a:r>
-              <a:rPr lang="en-US" b="1" dirty="0"/>
-              <a:t>Variable Setup</a:t>
-            </a:r>
-            <a:r>
-              <a:rPr lang="en-US" dirty="0"/>
-              <a:t>: </a:t>
-            </a:r>
-          </a:p>
-          <a:p>
-            <a:r>
-              <a:rPr lang="en-US" dirty="0"/>
-              <a:t>An integer </a:t>
-            </a:r>
-            <a:r>
-              <a:rPr lang="en-US" sz="1200" kern="1200" dirty="0">
-                <a:solidFill>
-                  <a:schemeClr val="tx1"/>
-                </a:solidFill>
-                <a:latin typeface="+mn-lt"/>
-                <a:ea typeface="+mn-ea"/>
-                <a:cs typeface="+mn-cs"/>
-              </a:rPr>
-              <a:t>var</a:t>
-            </a:r>
-            <a:r>
-              <a:rPr lang="en-US" dirty="0"/>
-              <a:t> is initialized with the value </a:t>
-            </a:r>
-            <a:r>
-              <a:rPr lang="en-US" b="1" dirty="0"/>
-              <a:t>100</a:t>
-            </a:r>
-            <a:r>
-              <a:rPr lang="en-US" dirty="0"/>
-              <a:t>.</a:t>
-            </a:r>
-          </a:p>
-          <a:p>
-            <a:endParaRPr lang="en-US" dirty="0"/>
-          </a:p>
-          <a:p>
-            <a:r>
-              <a:rPr lang="en-US" b="1" dirty="0"/>
-              <a:t>Pointer Assignment</a:t>
-            </a:r>
-            <a:r>
-              <a:rPr lang="en-US" dirty="0"/>
-              <a:t>: </a:t>
-            </a:r>
-          </a:p>
-          <a:p>
-            <a:r>
-              <a:rPr lang="en-US" dirty="0"/>
-              <a:t>A pointer </a:t>
-            </a:r>
-            <a:r>
-              <a:rPr lang="en-US" sz="1200" kern="1200" dirty="0" err="1">
-                <a:solidFill>
-                  <a:schemeClr val="tx1"/>
-                </a:solidFill>
-                <a:latin typeface="+mn-lt"/>
-                <a:ea typeface="+mn-ea"/>
-                <a:cs typeface="+mn-cs"/>
-              </a:rPr>
-              <a:t>pointerVar</a:t>
-            </a:r>
-            <a:r>
-              <a:rPr lang="en-US" dirty="0"/>
-              <a:t> is declared and assigned the memory address of </a:t>
-            </a:r>
-            <a:r>
-              <a:rPr lang="en-US" sz="1200" kern="1200" dirty="0">
-                <a:solidFill>
-                  <a:schemeClr val="tx1"/>
-                </a:solidFill>
-                <a:latin typeface="+mn-lt"/>
-                <a:ea typeface="+mn-ea"/>
-                <a:cs typeface="+mn-cs"/>
-              </a:rPr>
-              <a:t>var</a:t>
-            </a:r>
-            <a:r>
-              <a:rPr lang="en-US" dirty="0"/>
-              <a:t> using the </a:t>
-            </a:r>
-            <a:r>
-              <a:rPr lang="en-US" sz="1200" kern="1200" dirty="0">
-                <a:solidFill>
-                  <a:schemeClr val="tx1"/>
-                </a:solidFill>
-                <a:latin typeface="+mn-lt"/>
-                <a:ea typeface="+mn-ea"/>
-                <a:cs typeface="+mn-cs"/>
-              </a:rPr>
-              <a:t>&amp;</a:t>
-            </a:r>
-            <a:r>
-              <a:rPr lang="en-US" dirty="0"/>
-              <a:t> (address-of) operator.</a:t>
-            </a:r>
-          </a:p>
-          <a:p>
-            <a:endParaRPr lang="en-US" dirty="0"/>
-          </a:p>
-          <a:p>
-            <a:r>
-              <a:rPr lang="en-US" b="1" dirty="0"/>
-              <a:t>Accessing Data</a:t>
-            </a:r>
-            <a:r>
-              <a:rPr lang="en-US" dirty="0"/>
-              <a:t>: </a:t>
-            </a:r>
-          </a:p>
-          <a:p>
-            <a:r>
-              <a:rPr lang="en-US" dirty="0"/>
-              <a:t>The commented-out code suggests that </a:t>
-            </a:r>
-            <a:r>
-              <a:rPr lang="en-US" sz="1200" kern="1200" dirty="0">
-                <a:solidFill>
-                  <a:schemeClr val="tx1"/>
-                </a:solidFill>
-                <a:latin typeface="+mn-lt"/>
-                <a:ea typeface="+mn-ea"/>
-                <a:cs typeface="+mn-cs"/>
-              </a:rPr>
-              <a:t>*</a:t>
-            </a:r>
-            <a:r>
-              <a:rPr lang="en-US" sz="1200" kern="1200" dirty="0" err="1">
-                <a:solidFill>
-                  <a:schemeClr val="tx1"/>
-                </a:solidFill>
-                <a:latin typeface="+mn-lt"/>
-                <a:ea typeface="+mn-ea"/>
-                <a:cs typeface="+mn-cs"/>
-              </a:rPr>
-              <a:t>pointerVar</a:t>
-            </a:r>
-            <a:r>
-              <a:rPr lang="en-US" dirty="0"/>
-              <a:t> would retrieve the value </a:t>
-            </a:r>
-            <a:r>
-              <a:rPr lang="en-US" b="1" dirty="0"/>
-              <a:t>100</a:t>
-            </a:r>
-            <a:r>
-              <a:rPr lang="en-US" dirty="0"/>
-              <a:t>, while </a:t>
-            </a:r>
-            <a:r>
-              <a:rPr lang="en-US" sz="1200" kern="1200" dirty="0" err="1">
-                <a:solidFill>
-                  <a:schemeClr val="tx1"/>
-                </a:solidFill>
-                <a:latin typeface="+mn-lt"/>
-                <a:ea typeface="+mn-ea"/>
-                <a:cs typeface="+mn-cs"/>
-              </a:rPr>
-              <a:t>pointerVar</a:t>
-            </a:r>
-            <a:r>
-              <a:rPr lang="en-US" dirty="0"/>
-              <a:t> itself holds the hexadecimal memory address.</a:t>
+              <a:t>Every memory location has a unique address and holds content, often represented as hexadecimal byte values.</a:t>
             </a:r>
           </a:p>
           <a:p>
@@ -2036,7 +1727,7 @@
           <a:p>
             <a:fld id="{47C4BADD-04F7-41D2-9669-C72D2F0F5FAD}" type="slidenum">
               <a:rPr lang="en-US" smtClean="0"/>
-              <a:t>4</a:t>
+              <a:t>3</a:t>
             </a:fld>
             <a:endParaRPr lang="en-US"/>
           </a:p>
@@ -2045,7 +1736,7 @@
     </p:spTree>
     <p:extLst>
       <p:ext uri="{BB962C8B-B14F-4D97-AF65-F5344CB8AC3E}">
-        <p14:creationId xmlns:p14="http://schemas.microsoft.com/office/powerpoint/2010/main" val="4009194528"/>
+        <p14:creationId xmlns:p14="http://schemas.microsoft.com/office/powerpoint/2010/main" val="1140512018"/>
       </p:ext>
     </p:extLst>
   </p:cSld>
@@ -2099,50 +1790,6 @@
           <a:bodyPr/>
           <a:lstStyle/>
           <a:p>
-            <a:r>
-              <a:rPr lang="en-US" b="1" dirty="0"/>
-              <a:t>Pointer Arithmetic</a:t>
-            </a:r>
-            <a:endParaRPr lang="en-US" dirty="0"/>
-          </a:p>
-          <a:p>
-            <a:r>
-              <a:rPr lang="en-US" b="1" dirty="0"/>
-              <a:t>Concept: </a:t>
-            </a:r>
-            <a:r>
-              <a:rPr lang="en-US" dirty="0"/>
-              <a:t>Pointers can be incremented or decremented to move to the next or previous memory locations.</a:t>
-            </a:r>
-          </a:p>
-          <a:p>
-            <a:endParaRPr lang="en-US" dirty="0"/>
-          </a:p>
-          <a:p>
-            <a:r>
-              <a:rPr lang="en-US" b="1" dirty="0"/>
-              <a:t>See example:</a:t>
-            </a:r>
-          </a:p>
-          <a:p>
-            <a:r>
-              <a:rPr lang="en-US" dirty="0"/>
-              <a:t>pointer_arithmetic_1.c</a:t>
-            </a:r>
-          </a:p>
-          <a:p>
-            <a:endParaRPr lang="en-US" dirty="0"/>
-          </a:p>
-          <a:p>
-            <a:endParaRPr lang="en-US" dirty="0"/>
-          </a:p>
-          <a:p>
-            <a:r>
-              <a:rPr lang="en-US" dirty="0"/>
-              <a:t>---</a:t>
-            </a:r>
-          </a:p>
-          <a:p>
             <a:pPr marL="0" marR="0" lvl="0" indent="0" algn="l" defTabSz="914400" rtl="0" eaLnBrk="1" fontAlgn="auto" latinLnBrk="0" hangingPunct="1">
               <a:lnSpc>
                 <a:spcPct val="100000"/>
@@ -2162,44 +1809,23 @@
             </a:pPr>
             <a:r>
               <a:rPr lang="en-US" b="1" dirty="0"/>
-              <a:t>Long-form Description:</a:t>
-            </a:r>
-          </a:p>
-          <a:p>
-            <a:endParaRPr lang="en-US" dirty="0"/>
+              <a:t>Pointers in C</a:t>
+            </a:r>
+          </a:p>
+          <a:p>
+            <a:endParaRPr lang="en-US" b="1" dirty="0"/>
           </a:p>
           <a:p>
             <a:r>
               <a:rPr lang="en-US" b="1" dirty="0"/>
-              <a:t>Pointers and Arrays</a:t>
-            </a:r>
-          </a:p>
-          <a:p>
+              <a:t>Variable Value</a:t>
+            </a:r>
             <a:r>
               <a:rPr lang="en-US" dirty="0"/>
-              <a:t>The image illustrates how an array name acts as a pointer to its first element.</a:t>
-            </a:r>
-          </a:p>
-          <a:p>
-            <a:endParaRPr lang="en-US" dirty="0"/>
-          </a:p>
-          <a:p>
-            <a:r>
-              <a:rPr lang="en-US" b="1" dirty="0"/>
-              <a:t>Array Definition</a:t>
-            </a:r>
-            <a:r>
-              <a:rPr lang="en-US" dirty="0"/>
-              <a:t>:</a:t>
-            </a:r>
-          </a:p>
-          <a:p>
-            <a:r>
-              <a:rPr lang="en-US" dirty="0"/>
-              <a:t>An array </a:t>
-            </a:r>
-            <a:r>
-              <a:rPr lang="en-US" sz="1200" kern="1200" dirty="0" err="1">
+              <a:t>: Accessed via the variable name (</a:t>
+            </a:r>
+            <a:r>
+              <a:rPr lang="en-US" sz="1200" kern="1200" dirty="0">
                 <a:solidFill>
                   <a:schemeClr val="tx1"/>
                 </a:solidFill>
@@ -2207,38 +1833,21 @@
                 <a:ea typeface="+mn-ea"/>
                 <a:cs typeface="+mn-cs"/>
               </a:rPr>
-              <a:t>arr</a:t>
+              <a:t>var</a:t>
             </a:r>
             <a:r>
               <a:rPr lang="en-US" dirty="0"/>
-              <a:t> is created containing the elements </a:t>
-            </a:r>
+              <a:t>).</a:t>
+            </a:r>
+          </a:p>
+          <a:p>
             <a:r>
               <a:rPr lang="en-US" b="1" dirty="0"/>
-              <a:t>{1, 2, 3}</a:t>
+              <a:t>Address of Variable</a:t>
             </a:r>
             <a:r>
               <a:rPr lang="en-US" dirty="0"/>
-              <a:t>.</a:t>
-            </a:r>
-          </a:p>
-          <a:p>
-            <a:endParaRPr lang="en-US" dirty="0"/>
-          </a:p>
-          <a:p>
-            <a:r>
-              <a:rPr lang="en-US" b="1" dirty="0"/>
-              <a:t>Pointer Link</a:t>
-            </a:r>
-            <a:r>
-              <a:rPr lang="en-US" dirty="0"/>
-              <a:t>: </a:t>
-            </a:r>
-          </a:p>
-          <a:p>
-            <a:r>
-              <a:rPr lang="en-US" dirty="0"/>
-              <a:t>Setting </a:t>
+              <a:t>: Obtained using the address-of operator (</a:t>
             </a:r>
             <a:r>
               <a:rPr lang="en-US" sz="1200" kern="1200" dirty="0">
@@ -2249,10 +1858,24 @@
                 <a:ea typeface="+mn-ea"/>
                 <a:cs typeface="+mn-cs"/>
               </a:rPr>
-              <a:t>int *</a:t>
-            </a:r>
-            <a:r>
-              <a:rPr lang="en-US" sz="1200" kern="1200" dirty="0" err="1">
+              <a:t>&amp;var</a:t>
+            </a:r>
+            <a:r>
+              <a:rPr lang="en-US" dirty="0"/>
+              <a:t>).</a:t>
+            </a:r>
+          </a:p>
+          <a:p>
+            <a:r>
+              <a:rPr lang="en-US" b="1" dirty="0"/>
+              <a:t>Pointer Assignment</a:t>
+            </a:r>
+            <a:r>
+              <a:rPr lang="en-US" dirty="0"/>
+              <a:t>: A pointer is assigned an address using </a:t>
+            </a:r>
+            <a:r>
+              <a:rPr lang="en-US" sz="1200" kern="1200" dirty="0">
                 <a:solidFill>
                   <a:schemeClr val="tx1"/>
                 </a:solidFill>
@@ -2260,10 +1883,10 @@
                 <a:ea typeface="+mn-ea"/>
                 <a:cs typeface="+mn-cs"/>
               </a:rPr>
-              <a:t>ptr</a:t>
-            </a:r>
-            <a:r>
-              <a:rPr lang="en-US" sz="1200" kern="1200" dirty="0">
+              <a:t>*</a:t>
+            </a:r>
+            <a:r>
+              <a:rPr lang="en-US" sz="1200" kern="1200" dirty="0" err="1">
                 <a:solidFill>
                   <a:schemeClr val="tx1"/>
                 </a:solidFill>
@@ -2271,10 +1894,10 @@
                 <a:ea typeface="+mn-ea"/>
                 <a:cs typeface="+mn-cs"/>
               </a:rPr>
-              <a:t> = </a:t>
-            </a:r>
-            <a:r>
-              <a:rPr lang="en-US" sz="1200" kern="1200" dirty="0" err="1">
+              <a:t>pointerVar</a:t>
+            </a:r>
+            <a:r>
+              <a:rPr lang="en-US" sz="1200" kern="1200" dirty="0">
                 <a:solidFill>
                   <a:schemeClr val="tx1"/>
                 </a:solidFill>
@@ -2282,14 +1905,24 @@
                 <a:ea typeface="+mn-ea"/>
                 <a:cs typeface="+mn-cs"/>
               </a:rPr>
-              <a:t>arr</a:t>
+              <a:t> = &amp;var</a:t>
             </a:r>
             <a:r>
               <a:rPr lang="en-US" dirty="0"/>
-              <a:t> makes the pointer point to the first element, </a:t>
-            </a:r>
-            <a:r>
-              <a:rPr lang="en-US" sz="1200" kern="1200" dirty="0" err="1">
+              <a:t>.</a:t>
+            </a:r>
+          </a:p>
+          <a:p>
+            <a:r>
+              <a:rPr lang="en-US" b="1" dirty="0"/>
+              <a:t>Dereferencing</a:t>
+            </a:r>
+            <a:r>
+              <a:rPr lang="en-US" dirty="0"/>
+              <a:t>: </a:t>
+            </a:r>
+            <a:r>
+              <a:rPr lang="en-US" sz="1200" kern="1200" dirty="0">
                 <a:solidFill>
                   <a:schemeClr val="tx1"/>
                 </a:solidFill>
@@ -2297,10 +1930,10 @@
                 <a:ea typeface="+mn-ea"/>
                 <a:cs typeface="+mn-cs"/>
               </a:rPr>
-              <a:t>arr</a:t>
-            </a:r>
-            <a:r>
-              <a:rPr lang="en-US" sz="1200" kern="1200" dirty="0">
+              <a:t>*</a:t>
+            </a:r>
+            <a:r>
+              <a:rPr lang="en-US" sz="1200" kern="1200" dirty="0" err="1">
                 <a:solidFill>
                   <a:schemeClr val="tx1"/>
                 </a:solidFill>
@@ -2308,30 +1941,21 @@
                 <a:ea typeface="+mn-ea"/>
                 <a:cs typeface="+mn-cs"/>
               </a:rPr>
-              <a:t>[0]</a:t>
+              <a:t>pointerVar</a:t>
             </a:r>
             <a:r>
               <a:rPr lang="en-US" dirty="0"/>
-              <a:t>.</a:t>
-            </a:r>
-          </a:p>
-          <a:p>
-            <a:endParaRPr lang="en-US" dirty="0"/>
+              <a:t> retrieves the value stored at the address.</a:t>
+            </a:r>
           </a:p>
           <a:p>
             <a:r>
               <a:rPr lang="en-US" b="1" dirty="0"/>
-              <a:t>Pointer Arithmetic</a:t>
+              <a:t>Stored Address</a:t>
             </a:r>
             <a:r>
               <a:rPr lang="en-US" dirty="0"/>
               <a:t>: </a:t>
-            </a:r>
-          </a:p>
-          <a:p>
-            <a:r>
-              <a:rPr lang="en-US" dirty="0"/>
-              <a:t>A commented-out line </a:t>
             </a:r>
             <a:r>
               <a:rPr lang="en-US" sz="1200" kern="1200" dirty="0" err="1">
@@ -2342,7 +1966,79 @@
                 <a:ea typeface="+mn-ea"/>
                 <a:cs typeface="+mn-cs"/>
               </a:rPr>
-              <a:t>ptr</a:t>
+              <a:t>pointerVar</a:t>
+            </a:r>
+            <a:r>
+              <a:rPr lang="en-US" dirty="0"/>
+              <a:t> displays the actual address stored in the pointer.</a:t>
+            </a:r>
+          </a:p>
+          <a:p>
+            <a:endParaRPr lang="en-US" dirty="0"/>
+          </a:p>
+          <a:p>
+            <a:r>
+              <a:rPr lang="en-US" b="1" dirty="0"/>
+              <a:t>See example:</a:t>
+            </a:r>
+          </a:p>
+          <a:p>
+            <a:r>
+              <a:rPr lang="en-US" dirty="0" err="1"/>
+              <a:t>pointer_intro.c</a:t>
+            </a:r>
+            <a:endParaRPr lang="en-US" dirty="0"/>
+          </a:p>
+          <a:p>
+            <a:endParaRPr lang="en-US" dirty="0"/>
+          </a:p>
+          <a:p>
+            <a:endParaRPr lang="en-US" dirty="0"/>
+          </a:p>
+          <a:p>
+            <a:r>
+              <a:rPr lang="en-US" dirty="0"/>
+              <a:t>---</a:t>
+            </a:r>
+          </a:p>
+          <a:p>
+            <a:r>
+              <a:rPr lang="en-US" b="1" dirty="0"/>
+              <a:t>Long-form Description:</a:t>
+            </a:r>
+          </a:p>
+          <a:p>
+            <a:endParaRPr lang="en-US" dirty="0"/>
+          </a:p>
+          <a:p>
+            <a:r>
+              <a:rPr lang="en-US" b="1" dirty="0"/>
+              <a:t>Basic Pointer Declaration</a:t>
+            </a:r>
+          </a:p>
+          <a:p>
+            <a:r>
+              <a:rPr lang="en-US" dirty="0"/>
+              <a:t>The image demonstrates the fundamental relationship between a variable and its pointer.</a:t>
+            </a:r>
+          </a:p>
+          <a:p>
+            <a:endParaRPr lang="en-US" dirty="0"/>
+          </a:p>
+          <a:p>
+            <a:r>
+              <a:rPr lang="en-US" b="1" dirty="0"/>
+              <a:t>Variable Setup</a:t>
+            </a:r>
+            <a:r>
+              <a:rPr lang="en-US" dirty="0"/>
+              <a:t>: </a:t>
+            </a:r>
+          </a:p>
+          <a:p>
+            <a:r>
+              <a:rPr lang="en-US" dirty="0"/>
+              <a:t>An integer </a:t>
             </a:r>
             <a:r>
               <a:rPr lang="en-US" sz="1200" kern="1200" dirty="0">
@@ -2353,19 +2049,38 @@
                 <a:ea typeface="+mn-ea"/>
                 <a:cs typeface="+mn-cs"/>
               </a:rPr>
-              <a:t>++</a:t>
+              <a:t>var</a:t>
             </a:r>
             <a:r>
               <a:rPr lang="en-US" dirty="0"/>
-              <a:t> indicates that incrementing the pointer would shift it to point at the next element, </a:t>
+              <a:t> is initialized with the value </a:t>
             </a:r>
             <a:r>
               <a:rPr lang="en-US" b="1" dirty="0"/>
-              <a:t>2</a:t>
+              <a:t>100</a:t>
             </a:r>
             <a:r>
               <a:rPr lang="en-US" dirty="0"/>
-              <a:t> (</a:t>
+              <a:t>.</a:t>
+            </a:r>
+          </a:p>
+          <a:p>
+            <a:endParaRPr lang="en-US" dirty="0"/>
+          </a:p>
+          <a:p>
+            <a:r>
+              <a:rPr lang="en-US" b="1" dirty="0"/>
+              <a:t>Pointer Assignment</a:t>
+            </a:r>
+            <a:r>
+              <a:rPr lang="en-US" dirty="0"/>
+              <a:t>: </a:t>
+            </a:r>
+          </a:p>
+          <a:p>
+            <a:r>
+              <a:rPr lang="en-US" dirty="0"/>
+              <a:t>A pointer </a:t>
             </a:r>
             <a:r>
               <a:rPr lang="en-US" sz="1200" kern="1200" dirty="0" err="1">
@@ -2376,7 +2091,11 @@
                 <a:ea typeface="+mn-ea"/>
                 <a:cs typeface="+mn-cs"/>
               </a:rPr>
-              <a:t>arr</a:t>
+              <a:t>pointerVar</a:t>
+            </a:r>
+            <a:r>
+              <a:rPr lang="en-US" dirty="0"/>
+              <a:t> is declared and assigned the memory address of </a:t>
             </a:r>
             <a:r>
               <a:rPr lang="en-US" sz="1200" kern="1200" dirty="0">
@@ -2387,11 +2106,94 @@
                 <a:ea typeface="+mn-ea"/>
                 <a:cs typeface="+mn-cs"/>
               </a:rPr>
-              <a:t>[1]</a:t>
+              <a:t>var</a:t>
             </a:r>
             <a:r>
               <a:rPr lang="en-US" dirty="0"/>
-              <a:t>).</a:t>
+              <a:t> using the </a:t>
+            </a:r>
+            <a:r>
+              <a:rPr lang="en-US" sz="1200" kern="1200" dirty="0">
+                <a:solidFill>
+                  <a:schemeClr val="tx1"/>
+                </a:solidFill>
+                <a:latin typeface="+mn-lt"/>
+                <a:ea typeface="+mn-ea"/>
+                <a:cs typeface="+mn-cs"/>
+              </a:rPr>
+              <a:t>&amp;</a:t>
+            </a:r>
+            <a:r>
+              <a:rPr lang="en-US" dirty="0"/>
+              <a:t> (address-of) operator.</a:t>
+            </a:r>
+          </a:p>
+          <a:p>
+            <a:endParaRPr lang="en-US" dirty="0"/>
+          </a:p>
+          <a:p>
+            <a:r>
+              <a:rPr lang="en-US" b="1" dirty="0"/>
+              <a:t>Accessing Data</a:t>
+            </a:r>
+            <a:r>
+              <a:rPr lang="en-US" dirty="0"/>
+              <a:t>: </a:t>
+            </a:r>
+          </a:p>
+          <a:p>
+            <a:r>
+              <a:rPr lang="en-US" dirty="0"/>
+              <a:t>The commented-out code suggests that </a:t>
+            </a:r>
+            <a:r>
+              <a:rPr lang="en-US" sz="1200" kern="1200" dirty="0">
+                <a:solidFill>
+                  <a:schemeClr val="tx1"/>
+                </a:solidFill>
+                <a:latin typeface="+mn-lt"/>
+                <a:ea typeface="+mn-ea"/>
+                <a:cs typeface="+mn-cs"/>
+              </a:rPr>
+              <a:t>*</a:t>
+            </a:r>
+            <a:r>
+              <a:rPr lang="en-US" sz="1200" kern="1200" dirty="0" err="1">
+                <a:solidFill>
+                  <a:schemeClr val="tx1"/>
+                </a:solidFill>
+                <a:latin typeface="+mn-lt"/>
+                <a:ea typeface="+mn-ea"/>
+                <a:cs typeface="+mn-cs"/>
+              </a:rPr>
+              <a:t>pointerVar</a:t>
+            </a:r>
+            <a:r>
+              <a:rPr lang="en-US" dirty="0"/>
+              <a:t> would retrieve the value </a:t>
+            </a:r>
+            <a:r>
+              <a:rPr lang="en-US" b="1" dirty="0"/>
+              <a:t>100</a:t>
+            </a:r>
+            <a:r>
+              <a:rPr lang="en-US" dirty="0"/>
+              <a:t>, while </a:t>
+            </a:r>
+            <a:r>
+              <a:rPr lang="en-US" sz="1200" kern="1200" dirty="0" err="1">
+                <a:solidFill>
+                  <a:schemeClr val="tx1"/>
+                </a:solidFill>
+                <a:latin typeface="+mn-lt"/>
+                <a:ea typeface="+mn-ea"/>
+                <a:cs typeface="+mn-cs"/>
+              </a:rPr>
+              <a:t>pointerVar</a:t>
+            </a:r>
+            <a:r>
+              <a:rPr lang="en-US" dirty="0"/>
+              <a:t> itself holds the hexadecimal memory address.</a:t>
             </a:r>
           </a:p>
           <a:p>
@@ -2416,7 +2218,7 @@
           <a:p>
             <a:fld id="{47C4BADD-04F7-41D2-9669-C72D2F0F5FAD}" type="slidenum">
               <a:rPr lang="en-US" smtClean="0"/>
-              <a:t>5</a:t>
+              <a:t>4</a:t>
             </a:fld>
             <a:endParaRPr lang="en-US"/>
           </a:p>
@@ -2425,7 +2227,7 @@
     </p:spTree>
     <p:extLst>
       <p:ext uri="{BB962C8B-B14F-4D97-AF65-F5344CB8AC3E}">
-        <p14:creationId xmlns:p14="http://schemas.microsoft.com/office/powerpoint/2010/main" val="3273208394"/>
+        <p14:creationId xmlns:p14="http://schemas.microsoft.com/office/powerpoint/2010/main" val="4009194528"/>
       </p:ext>
     </p:extLst>
   </p:cSld>
@@ -2483,16 +2285,16 @@
               <a:rPr lang="en-US" b="1" dirty="0"/>
               <a:t>Pointer Arithmetic</a:t>
             </a:r>
-            <a:endParaRPr lang="en-US" b="0" dirty="0"/>
+            <a:endParaRPr lang="en-US" dirty="0"/>
           </a:p>
           <a:p>
             <a:r>
               <a:rPr lang="en-US" b="1" dirty="0"/>
-              <a:t>Application</a:t>
+              <a:t>Concept: </a:t>
             </a:r>
             <a:r>
               <a:rPr lang="en-US" dirty="0"/>
-              <a:t>: Pointer arithmetic is used to iterate through arrays to access individual elements.</a:t>
+              <a:t>Pointers can be incremented or decremented to move to the next or previous memory locations.</a:t>
             </a:r>
           </a:p>
           <a:p>
@@ -2507,7 +2309,7 @@
           <a:p>
             <a:r>
               <a:rPr lang="en-US" dirty="0"/>
-              <a:t>pointer_arithmetic_2.c</a:t>
+              <a:t>pointer_arithmetic_1.c</a:t>
             </a:r>
           </a:p>
           <a:p>
@@ -2544,40 +2346,39 @@
               <a:rPr lang="en-US" b="1" dirty="0"/>
               <a:t>Long-form Description:</a:t>
             </a:r>
+          </a:p>
+          <a:p>
             <a:endParaRPr lang="en-US" dirty="0"/>
           </a:p>
           <a:p>
+            <a:r>
+              <a:rPr lang="en-US" b="1" dirty="0"/>
+              <a:t>Pointers and Arrays</a:t>
+            </a:r>
+          </a:p>
+          <a:p>
+            <a:r>
+              <a:rPr lang="en-US" dirty="0"/>
+              <a:t>The image illustrates how an array name acts as a pointer to its first element.</a:t>
+            </a:r>
+          </a:p>
+          <a:p>
             <a:endParaRPr lang="en-US" dirty="0"/>
           </a:p>
           <a:p>
             <a:r>
               <a:rPr lang="en-US" b="1" dirty="0"/>
-              <a:t>Iterating with Pointer Arithmetic</a:t>
-            </a:r>
-          </a:p>
-          <a:p>
+              <a:t>Array Definition</a:t>
+            </a:r>
             <a:r>
               <a:rPr lang="en-US" dirty="0"/>
-              <a:t>The image shows a common pattern for traversing an entire array using a loop and pointer arithmetic.</a:t>
-            </a:r>
-          </a:p>
-          <a:p>
-            <a:endParaRPr lang="en-US" dirty="0"/>
-          </a:p>
-          <a:p>
-            <a:r>
-              <a:rPr lang="en-US" b="1" dirty="0"/>
-              <a:t>Dynamic Length</a:t>
-            </a:r>
+              <a:t>:</a:t>
+            </a:r>
+          </a:p>
+          <a:p>
             <a:r>
               <a:rPr lang="en-US" dirty="0"/>
-              <a:t>: </a:t>
-            </a:r>
-          </a:p>
-          <a:p>
-            <a:r>
-              <a:rPr lang="en-US" dirty="0"/>
-              <a:t>The code calculates the number of elements using </a:t>
+              <a:t>An array </a:t>
             </a:r>
             <a:r>
               <a:rPr lang="en-US" sz="1200" kern="1200" dirty="0" err="1">
@@ -2588,7 +2389,38 @@
                 <a:ea typeface="+mn-ea"/>
                 <a:cs typeface="+mn-cs"/>
               </a:rPr>
-              <a:t>sizeof</a:t>
+              <a:t>arr</a:t>
+            </a:r>
+            <a:r>
+              <a:rPr lang="en-US" dirty="0"/>
+              <a:t> is created containing the elements </a:t>
+            </a:r>
+            <a:r>
+              <a:rPr lang="en-US" b="1" dirty="0"/>
+              <a:t>{1, 2, 3}</a:t>
+            </a:r>
+            <a:r>
+              <a:rPr lang="en-US" dirty="0"/>
+              <a:t>.</a:t>
+            </a:r>
+          </a:p>
+          <a:p>
+            <a:endParaRPr lang="en-US" dirty="0"/>
+          </a:p>
+          <a:p>
+            <a:r>
+              <a:rPr lang="en-US" b="1" dirty="0"/>
+              <a:t>Pointer Link</a:t>
+            </a:r>
+            <a:r>
+              <a:rPr lang="en-US" dirty="0"/>
+              <a:t>: </a:t>
+            </a:r>
+          </a:p>
+          <a:p>
+            <a:r>
+              <a:rPr lang="en-US" dirty="0"/>
+              <a:t>Setting </a:t>
             </a:r>
             <a:r>
               <a:rPr lang="en-US" sz="1200" kern="1200" dirty="0">
@@ -2599,7 +2431,7 @@
                 <a:ea typeface="+mn-ea"/>
                 <a:cs typeface="+mn-cs"/>
               </a:rPr>
-              <a:t>(</a:t>
+              <a:t>int *</a:t>
             </a:r>
             <a:r>
               <a:rPr lang="en-US" sz="1200" kern="1200" dirty="0" err="1">
@@ -2610,7 +2442,7 @@
                 <a:ea typeface="+mn-ea"/>
                 <a:cs typeface="+mn-cs"/>
               </a:rPr>
-              <a:t>arr</a:t>
+              <a:t>ptr</a:t>
             </a:r>
             <a:r>
               <a:rPr lang="en-US" sz="1200" kern="1200" dirty="0">
@@ -2621,7 +2453,7 @@
                 <a:ea typeface="+mn-ea"/>
                 <a:cs typeface="+mn-cs"/>
               </a:rPr>
-              <a:t>) / </a:t>
+              <a:t> = </a:t>
             </a:r>
             <a:r>
               <a:rPr lang="en-US" sz="1200" kern="1200" dirty="0" err="1">
@@ -2632,10 +2464,14 @@
                 <a:ea typeface="+mn-ea"/>
                 <a:cs typeface="+mn-cs"/>
               </a:rPr>
-              <a:t>sizeof</a:t>
-            </a:r>
-            <a:r>
-              <a:rPr lang="en-US" sz="1200" kern="1200" dirty="0">
+              <a:t>arr</a:t>
+            </a:r>
+            <a:r>
+              <a:rPr lang="en-US" dirty="0"/>
+              <a:t> makes the pointer point to the first element, </a:t>
+            </a:r>
+            <a:r>
+              <a:rPr lang="en-US" sz="1200" kern="1200" dirty="0" err="1">
                 <a:solidFill>
                   <a:schemeClr val="tx1"/>
                 </a:solidFill>
@@ -2643,10 +2479,10 @@
                 <a:ea typeface="+mn-ea"/>
                 <a:cs typeface="+mn-cs"/>
               </a:rPr>
-              <a:t>(</a:t>
-            </a:r>
-            <a:r>
-              <a:rPr lang="en-US" sz="1200" kern="1200" dirty="0" err="1">
+              <a:t>arr</a:t>
+            </a:r>
+            <a:r>
+              <a:rPr lang="en-US" sz="1200" kern="1200" dirty="0">
                 <a:solidFill>
                   <a:schemeClr val="tx1"/>
                 </a:solidFill>
@@ -2654,10 +2490,33 @@
                 <a:ea typeface="+mn-ea"/>
                 <a:cs typeface="+mn-cs"/>
               </a:rPr>
-              <a:t>arr</a:t>
-            </a:r>
-            <a:r>
-              <a:rPr lang="en-US" sz="1200" kern="1200" dirty="0">
+              <a:t>[0]</a:t>
+            </a:r>
+            <a:r>
+              <a:rPr lang="en-US" dirty="0"/>
+              <a:t>.</a:t>
+            </a:r>
+          </a:p>
+          <a:p>
+            <a:endParaRPr lang="en-US" dirty="0"/>
+          </a:p>
+          <a:p>
+            <a:r>
+              <a:rPr lang="en-US" b="1" dirty="0"/>
+              <a:t>Pointer Arithmetic</a:t>
+            </a:r>
+            <a:r>
+              <a:rPr lang="en-US" dirty="0"/>
+              <a:t>: </a:t>
+            </a:r>
+          </a:p>
+          <a:p>
+            <a:r>
+              <a:rPr lang="en-US" dirty="0"/>
+              <a:t>A commented-out line </a:t>
+            </a:r>
+            <a:r>
+              <a:rPr lang="en-US" sz="1200" kern="1200" dirty="0" err="1">
                 <a:solidFill>
                   <a:schemeClr val="tx1"/>
                 </a:solidFill>
@@ -2665,30 +2524,7 @@
                 <a:ea typeface="+mn-ea"/>
                 <a:cs typeface="+mn-cs"/>
               </a:rPr>
-              <a:t>[0])</a:t>
-            </a:r>
-            <a:r>
-              <a:rPr lang="en-US" dirty="0"/>
-              <a:t>.</a:t>
-            </a:r>
-          </a:p>
-          <a:p>
-            <a:endParaRPr lang="en-US" dirty="0"/>
-          </a:p>
-          <a:p>
-            <a:r>
-              <a:rPr lang="en-US" b="1" dirty="0"/>
-              <a:t>The Loop</a:t>
-            </a:r>
-            <a:r>
-              <a:rPr lang="en-US" dirty="0"/>
-              <a:t>: </a:t>
-            </a:r>
-          </a:p>
-          <a:p>
-            <a:r>
-              <a:rPr lang="en-US" dirty="0"/>
-              <a:t>A </a:t>
+              <a:t>ptr</a:t>
             </a:r>
             <a:r>
               <a:rPr lang="en-US" sz="1200" kern="1200" dirty="0">
@@ -2699,33 +2535,22 @@
                 <a:ea typeface="+mn-ea"/>
                 <a:cs typeface="+mn-cs"/>
               </a:rPr>
-              <a:t>for</a:t>
+              <a:t>++</a:t>
             </a:r>
             <a:r>
               <a:rPr lang="en-US" dirty="0"/>
-              <a:t> loop iterates through the array.</a:t>
-            </a:r>
-          </a:p>
-          <a:p>
-            <a:endParaRPr lang="en-US" dirty="0"/>
-          </a:p>
-          <a:p>
+              <a:t> indicates that incrementing the pointer would shift it to point at the next element, </a:t>
+            </a:r>
             <a:r>
               <a:rPr lang="en-US" b="1" dirty="0"/>
-              <a:t>Dereferencing</a:t>
+              <a:t>2</a:t>
             </a:r>
             <a:r>
               <a:rPr lang="en-US" dirty="0"/>
-              <a:t>: </a:t>
-            </a:r>
-          </a:p>
-          <a:p>
-            <a:r>
-              <a:rPr lang="en-US" dirty="0"/>
-              <a:t>The expression </a:t>
-            </a:r>
-            <a:r>
-              <a:rPr lang="en-US" sz="1200" kern="1200" dirty="0">
+              <a:t> (</a:t>
+            </a:r>
+            <a:r>
+              <a:rPr lang="en-US" sz="1200" kern="1200" dirty="0" err="1">
                 <a:solidFill>
                   <a:schemeClr val="tx1"/>
                 </a:solidFill>
@@ -2733,10 +2558,10 @@
                 <a:ea typeface="+mn-ea"/>
                 <a:cs typeface="+mn-cs"/>
               </a:rPr>
-              <a:t>*(</a:t>
-            </a:r>
-            <a:r>
-              <a:rPr lang="en-US" sz="1200" kern="1200" dirty="0" err="1">
+              <a:t>arr</a:t>
+            </a:r>
+            <a:r>
+              <a:rPr lang="en-US" sz="1200" kern="1200" dirty="0">
                 <a:solidFill>
                   <a:schemeClr val="tx1"/>
                 </a:solidFill>
@@ -2744,44 +2569,11 @@
                 <a:ea typeface="+mn-ea"/>
                 <a:cs typeface="+mn-cs"/>
               </a:rPr>
-              <a:t>ptr</a:t>
-            </a:r>
-            <a:r>
-              <a:rPr lang="en-US" sz="1200" kern="1200" dirty="0">
-                <a:solidFill>
-                  <a:schemeClr val="tx1"/>
-                </a:solidFill>
-                <a:latin typeface="+mn-lt"/>
-                <a:ea typeface="+mn-ea"/>
-                <a:cs typeface="+mn-cs"/>
-              </a:rPr>
-              <a:t> + </a:t>
-            </a:r>
-            <a:r>
-              <a:rPr lang="en-US" sz="1200" kern="1200" dirty="0" err="1">
-                <a:solidFill>
-                  <a:schemeClr val="tx1"/>
-                </a:solidFill>
-                <a:latin typeface="+mn-lt"/>
-                <a:ea typeface="+mn-ea"/>
-                <a:cs typeface="+mn-cs"/>
-              </a:rPr>
-              <a:t>i</a:t>
-            </a:r>
-            <a:r>
-              <a:rPr lang="en-US" sz="1200" kern="1200" dirty="0">
-                <a:solidFill>
-                  <a:schemeClr val="tx1"/>
-                </a:solidFill>
-                <a:latin typeface="+mn-lt"/>
-                <a:ea typeface="+mn-ea"/>
-                <a:cs typeface="+mn-cs"/>
-              </a:rPr>
-              <a:t>)</a:t>
+              <a:t>[1]</a:t>
             </a:r>
             <a:r>
               <a:rPr lang="en-US" dirty="0"/>
-              <a:t> is used to access each value by adding an offset to the base pointer and then dereferencing it.</a:t>
+              <a:t>).</a:t>
             </a:r>
           </a:p>
           <a:p>
@@ -2806,7 +2598,7 @@
           <a:p>
             <a:fld id="{47C4BADD-04F7-41D2-9669-C72D2F0F5FAD}" type="slidenum">
               <a:rPr lang="en-US" smtClean="0"/>
-              <a:t>6</a:t>
+              <a:t>5</a:t>
             </a:fld>
             <a:endParaRPr lang="en-US"/>
           </a:p>
@@ -2815,7 +2607,7 @@
     </p:spTree>
     <p:extLst>
       <p:ext uri="{BB962C8B-B14F-4D97-AF65-F5344CB8AC3E}">
-        <p14:creationId xmlns:p14="http://schemas.microsoft.com/office/powerpoint/2010/main" val="3561056334"/>
+        <p14:creationId xmlns:p14="http://schemas.microsoft.com/office/powerpoint/2010/main" val="3273208394"/>
       </p:ext>
     </p:extLst>
   </p:cSld>
@@ -2871,7 +2663,18 @@
           <a:p>
             <a:r>
               <a:rPr lang="en-US" b="1" dirty="0"/>
-              <a:t>Strings in C</a:t>
+              <a:t>Pointer Arithmetic</a:t>
+            </a:r>
+            <a:endParaRPr lang="en-US" b="0" dirty="0"/>
+          </a:p>
+          <a:p>
+            <a:r>
+              <a:rPr lang="en-US" b="1" dirty="0"/>
+              <a:t>Application</a:t>
+            </a:r>
+            <a:r>
+              <a:rPr lang="en-US" dirty="0"/>
+              <a:t>: Pointer arithmetic is used to iterate through arrays to access individual elements.</a:t>
             </a:r>
           </a:p>
           <a:p>
@@ -2880,20 +2683,86 @@
           <a:p>
             <a:r>
               <a:rPr lang="en-US" b="1" dirty="0"/>
-              <a:t>Structure</a:t>
-            </a:r>
+              <a:t>See example:</a:t>
+            </a:r>
+          </a:p>
+          <a:p>
             <a:r>
               <a:rPr lang="en-US" dirty="0"/>
-              <a:t>:</a:t>
-            </a:r>
+              <a:t>pointer_arithmetic_2.c</a:t>
+            </a:r>
+          </a:p>
+          <a:p>
+            <a:endParaRPr lang="en-US" dirty="0"/>
+          </a:p>
+          <a:p>
+            <a:endParaRPr lang="en-US" dirty="0"/>
           </a:p>
           <a:p>
             <a:r>
               <a:rPr lang="en-US" dirty="0"/>
-              <a:t>C-style strings are one-dimensional character arrays terminated by a null character (</a:t>
-            </a:r>
-            <a:r>
-              <a:rPr lang="en-US" sz="1200" kern="1200" dirty="0">
+              <a:t>---</a:t>
+            </a:r>
+          </a:p>
+          <a:p>
+            <a:pPr marL="0" marR="0" lvl="0" indent="0" algn="l" defTabSz="914400" rtl="0" eaLnBrk="1" fontAlgn="auto" latinLnBrk="0" hangingPunct="1">
+              <a:lnSpc>
+                <a:spcPct val="100000"/>
+              </a:lnSpc>
+              <a:spcBef>
+                <a:spcPts val="0"/>
+              </a:spcBef>
+              <a:spcAft>
+                <a:spcPts val="0"/>
+              </a:spcAft>
+              <a:buClrTx/>
+              <a:buSzTx/>
+              <a:buFontTx/>
+              <a:buNone/>
+              <a:tabLst/>
+              <a:defRPr/>
+            </a:pPr>
+            <a:r>
+              <a:rPr lang="en-US" b="1" dirty="0"/>
+              <a:t>Long-form Description:</a:t>
+            </a:r>
+            <a:endParaRPr lang="en-US" dirty="0"/>
+          </a:p>
+          <a:p>
+            <a:endParaRPr lang="en-US" dirty="0"/>
+          </a:p>
+          <a:p>
+            <a:r>
+              <a:rPr lang="en-US" b="1" dirty="0"/>
+              <a:t>Iterating with Pointer Arithmetic</a:t>
+            </a:r>
+          </a:p>
+          <a:p>
+            <a:r>
+              <a:rPr lang="en-US" dirty="0"/>
+              <a:t>The image shows a common pattern for traversing an entire array using a loop and pointer arithmetic.</a:t>
+            </a:r>
+          </a:p>
+          <a:p>
+            <a:endParaRPr lang="en-US" dirty="0"/>
+          </a:p>
+          <a:p>
+            <a:r>
+              <a:rPr lang="en-US" b="1" dirty="0"/>
+              <a:t>Dynamic Length</a:t>
+            </a:r>
+            <a:r>
+              <a:rPr lang="en-US" dirty="0"/>
+              <a:t>: </a:t>
+            </a:r>
+          </a:p>
+          <a:p>
+            <a:r>
+              <a:rPr lang="en-US" dirty="0"/>
+              <a:t>The code calculates the number of elements using </a:t>
+            </a:r>
+            <a:r>
+              <a:rPr lang="en-US" sz="1200" kern="1200" dirty="0" err="1">
                 <a:solidFill>
                   <a:schemeClr val="tx1"/>
                 </a:solidFill>
@@ -2901,52 +2770,10 @@
                 <a:ea typeface="+mn-ea"/>
                 <a:cs typeface="+mn-cs"/>
               </a:rPr>
-              <a:t>\0</a:t>
-            </a:r>
-            <a:r>
-              <a:rPr lang="en-US" dirty="0"/>
-              <a:t>).</a:t>
-            </a:r>
-          </a:p>
-          <a:p>
-            <a:endParaRPr lang="en-US" dirty="0"/>
-          </a:p>
-          <a:p>
-            <a:r>
-              <a:rPr lang="en-US" b="1" dirty="0"/>
-              <a:t>Length</a:t>
-            </a:r>
-            <a:r>
-              <a:rPr lang="en-US" dirty="0"/>
-              <a:t>:</a:t>
-            </a:r>
-          </a:p>
-          <a:p>
-            <a:r>
-              <a:rPr lang="en-US" dirty="0"/>
-              <a:t>C does not explicitly store string length; it relies on the null character as a "sentinel value".</a:t>
-            </a:r>
-          </a:p>
-          <a:p>
-            <a:endParaRPr lang="en-US" dirty="0"/>
-          </a:p>
-          <a:p>
-            <a:r>
-              <a:rPr lang="en-US" b="1" dirty="0"/>
-              <a:t>Functions</a:t>
-            </a:r>
-            <a:r>
-              <a:rPr lang="en-US" dirty="0"/>
-              <a:t>:</a:t>
-            </a:r>
-          </a:p>
-          <a:p>
-            <a:r>
-              <a:rPr lang="en-US" dirty="0"/>
-              <a:t>Standard functions like </a:t>
-            </a:r>
-            <a:r>
-              <a:rPr lang="en-US" sz="1200" b="1" kern="1200" dirty="0" err="1">
+              <a:t>sizeof</a:t>
+            </a:r>
+            <a:r>
+              <a:rPr lang="en-US" sz="1200" kern="1200" dirty="0">
                 <a:solidFill>
                   <a:schemeClr val="tx1"/>
                 </a:solidFill>
@@ -2954,14 +2781,10 @@
                 <a:ea typeface="+mn-ea"/>
                 <a:cs typeface="+mn-cs"/>
               </a:rPr>
-              <a:t>strcpy</a:t>
-            </a:r>
-            <a:r>
-              <a:rPr lang="en-US" dirty="0"/>
-              <a:t>, </a:t>
-            </a:r>
-            <a:r>
-              <a:rPr lang="en-US" sz="1200" b="1" kern="1200" dirty="0" err="1">
+              <a:t>(</a:t>
+            </a:r>
+            <a:r>
+              <a:rPr lang="en-US" sz="1200" kern="1200" dirty="0" err="1">
                 <a:solidFill>
                   <a:schemeClr val="tx1"/>
                 </a:solidFill>
@@ -2969,14 +2792,10 @@
                 <a:ea typeface="+mn-ea"/>
                 <a:cs typeface="+mn-cs"/>
               </a:rPr>
-              <a:t>strcat</a:t>
-            </a:r>
-            <a:r>
-              <a:rPr lang="en-US" dirty="0"/>
-              <a:t>, and </a:t>
-            </a:r>
-            <a:r>
-              <a:rPr lang="en-US" sz="1200" b="1" kern="1200" dirty="0" err="1">
+              <a:t>arr</a:t>
+            </a:r>
+            <a:r>
+              <a:rPr lang="en-US" sz="1200" kern="1200" dirty="0">
                 <a:solidFill>
                   <a:schemeClr val="tx1"/>
                 </a:solidFill>
@@ -2984,11 +2803,167 @@
                 <a:ea typeface="+mn-ea"/>
                 <a:cs typeface="+mn-cs"/>
               </a:rPr>
-              <a:t>strcmp</a:t>
+              <a:t>) / </a:t>
+            </a:r>
+            <a:r>
+              <a:rPr lang="en-US" sz="1200" kern="1200" dirty="0" err="1">
+                <a:solidFill>
+                  <a:schemeClr val="tx1"/>
+                </a:solidFill>
+                <a:latin typeface="+mn-lt"/>
+                <a:ea typeface="+mn-ea"/>
+                <a:cs typeface="+mn-cs"/>
+              </a:rPr>
+              <a:t>sizeof</a:t>
+            </a:r>
+            <a:r>
+              <a:rPr lang="en-US" sz="1200" kern="1200" dirty="0">
+                <a:solidFill>
+                  <a:schemeClr val="tx1"/>
+                </a:solidFill>
+                <a:latin typeface="+mn-lt"/>
+                <a:ea typeface="+mn-ea"/>
+                <a:cs typeface="+mn-cs"/>
+              </a:rPr>
+              <a:t>(</a:t>
+            </a:r>
+            <a:r>
+              <a:rPr lang="en-US" sz="1200" kern="1200" dirty="0" err="1">
+                <a:solidFill>
+                  <a:schemeClr val="tx1"/>
+                </a:solidFill>
+                <a:latin typeface="+mn-lt"/>
+                <a:ea typeface="+mn-ea"/>
+                <a:cs typeface="+mn-cs"/>
+              </a:rPr>
+              <a:t>arr</a:t>
+            </a:r>
+            <a:r>
+              <a:rPr lang="en-US" sz="1200" kern="1200" dirty="0">
+                <a:solidFill>
+                  <a:schemeClr val="tx1"/>
+                </a:solidFill>
+                <a:latin typeface="+mn-lt"/>
+                <a:ea typeface="+mn-ea"/>
+                <a:cs typeface="+mn-cs"/>
+              </a:rPr>
+              <a:t>[0])</a:t>
             </a:r>
             <a:r>
               <a:rPr lang="en-US" dirty="0"/>
-              <a:t> require the null terminator to function.</a:t>
+              <a:t>.</a:t>
+            </a:r>
+          </a:p>
+          <a:p>
+            <a:endParaRPr lang="en-US" dirty="0"/>
+          </a:p>
+          <a:p>
+            <a:r>
+              <a:rPr lang="en-US" b="1" dirty="0"/>
+              <a:t>The Loop</a:t>
+            </a:r>
+            <a:r>
+              <a:rPr lang="en-US" dirty="0"/>
+              <a:t>: </a:t>
+            </a:r>
+          </a:p>
+          <a:p>
+            <a:r>
+              <a:rPr lang="en-US" dirty="0"/>
+              <a:t>A </a:t>
+            </a:r>
+            <a:r>
+              <a:rPr lang="en-US" sz="1200" kern="1200" dirty="0">
+                <a:solidFill>
+                  <a:schemeClr val="tx1"/>
+                </a:solidFill>
+                <a:latin typeface="+mn-lt"/>
+                <a:ea typeface="+mn-ea"/>
+                <a:cs typeface="+mn-cs"/>
+              </a:rPr>
+              <a:t>for</a:t>
+            </a:r>
+            <a:r>
+              <a:rPr lang="en-US" dirty="0"/>
+              <a:t> loop iterates through the array.</a:t>
+            </a:r>
+          </a:p>
+          <a:p>
+            <a:endParaRPr lang="en-US" dirty="0"/>
+          </a:p>
+          <a:p>
+            <a:r>
+              <a:rPr lang="en-US" b="1" dirty="0"/>
+              <a:t>Dereferencing</a:t>
+            </a:r>
+            <a:r>
+              <a:rPr lang="en-US" dirty="0"/>
+              <a:t>: </a:t>
+            </a:r>
+          </a:p>
+          <a:p>
+            <a:r>
+              <a:rPr lang="en-US" dirty="0"/>
+              <a:t>The expression </a:t>
+            </a:r>
+            <a:r>
+              <a:rPr lang="en-US" sz="1200" kern="1200" dirty="0">
+                <a:solidFill>
+                  <a:schemeClr val="tx1"/>
+                </a:solidFill>
+                <a:latin typeface="+mn-lt"/>
+                <a:ea typeface="+mn-ea"/>
+                <a:cs typeface="+mn-cs"/>
+              </a:rPr>
+              <a:t>*(</a:t>
+            </a:r>
+            <a:r>
+              <a:rPr lang="en-US" sz="1200" kern="1200" dirty="0" err="1">
+                <a:solidFill>
+                  <a:schemeClr val="tx1"/>
+                </a:solidFill>
+                <a:latin typeface="+mn-lt"/>
+                <a:ea typeface="+mn-ea"/>
+                <a:cs typeface="+mn-cs"/>
+              </a:rPr>
+              <a:t>ptr</a:t>
+            </a:r>
+            <a:r>
+              <a:rPr lang="en-US" sz="1200" kern="1200" dirty="0">
+                <a:solidFill>
+                  <a:schemeClr val="tx1"/>
+                </a:solidFill>
+                <a:latin typeface="+mn-lt"/>
+                <a:ea typeface="+mn-ea"/>
+                <a:cs typeface="+mn-cs"/>
+              </a:rPr>
+              <a:t> + </a:t>
+            </a:r>
+            <a:r>
+              <a:rPr lang="en-US" sz="1200" kern="1200" dirty="0" err="1">
+                <a:solidFill>
+                  <a:schemeClr val="tx1"/>
+                </a:solidFill>
+                <a:latin typeface="+mn-lt"/>
+                <a:ea typeface="+mn-ea"/>
+                <a:cs typeface="+mn-cs"/>
+              </a:rPr>
+              <a:t>i</a:t>
+            </a:r>
+            <a:r>
+              <a:rPr lang="en-US" sz="1200" kern="1200" dirty="0">
+                <a:solidFill>
+                  <a:schemeClr val="tx1"/>
+                </a:solidFill>
+                <a:latin typeface="+mn-lt"/>
+                <a:ea typeface="+mn-ea"/>
+                <a:cs typeface="+mn-cs"/>
+              </a:rPr>
+              <a:t>)</a:t>
+            </a:r>
+            <a:r>
+              <a:rPr lang="en-US" dirty="0"/>
+              <a:t> is used to access each value by adding an offset to the base pointer and then dereferencing it.</a:t>
             </a:r>
           </a:p>
           <a:p>
@@ -3013,7 +2988,7 @@
           <a:p>
             <a:fld id="{47C4BADD-04F7-41D2-9669-C72D2F0F5FAD}" type="slidenum">
               <a:rPr lang="en-US" smtClean="0"/>
-              <a:t>7</a:t>
+              <a:t>6</a:t>
             </a:fld>
             <a:endParaRPr lang="en-US"/>
           </a:p>
@@ -3022,7 +2997,7 @@
     </p:spTree>
     <p:extLst>
       <p:ext uri="{BB962C8B-B14F-4D97-AF65-F5344CB8AC3E}">
-        <p14:creationId xmlns:p14="http://schemas.microsoft.com/office/powerpoint/2010/main" val="3978711689"/>
+        <p14:creationId xmlns:p14="http://schemas.microsoft.com/office/powerpoint/2010/main" val="3561056334"/>
       </p:ext>
     </p:extLst>
   </p:cSld>
@@ -3078,73 +3053,26 @@
           <a:p>
             <a:r>
               <a:rPr lang="en-US" b="1" dirty="0"/>
-              <a:t>Common Bugs - Null Bytes</a:t>
-            </a:r>
+              <a:t>Strings in C</a:t>
+            </a:r>
+          </a:p>
+          <a:p>
             <a:endParaRPr lang="en-US" dirty="0"/>
           </a:p>
           <a:p>
             <a:r>
               <a:rPr lang="en-US" b="1" dirty="0"/>
-              <a:t>Risk</a:t>
+              <a:t>Structure</a:t>
             </a:r>
             <a:r>
               <a:rPr lang="en-US" dirty="0"/>
-              <a:t>: Failing to null-terminate a string can lead to printing "garbage" values or program crashes.</a:t>
-            </a:r>
-          </a:p>
-          <a:p>
-            <a:endParaRPr lang="en-US" dirty="0"/>
-          </a:p>
-          <a:p>
-            <a:r>
-              <a:rPr lang="en-US" b="1" dirty="0"/>
-              <a:t>See example:</a:t>
-            </a:r>
-          </a:p>
-          <a:p>
-            <a:r>
-              <a:rPr lang="en-US" dirty="0" err="1"/>
-              <a:t>hello_string.c</a:t>
-            </a:r>
-            <a:endParaRPr lang="en-US" dirty="0"/>
-          </a:p>
-          <a:p>
-            <a:endParaRPr lang="en-US" dirty="0"/>
-          </a:p>
-          <a:p>
-            <a:endParaRPr lang="en-US" dirty="0"/>
+              <a:t>:</a:t>
+            </a:r>
           </a:p>
           <a:p>
             <a:r>
               <a:rPr lang="en-US" dirty="0"/>
-              <a:t>---</a:t>
-            </a:r>
-          </a:p>
-          <a:p>
-            <a:r>
-              <a:rPr lang="en-US" b="1" dirty="0"/>
-              <a:t>Long-form Description:</a:t>
-            </a:r>
-          </a:p>
-          <a:p>
-            <a:endParaRPr lang="en-US" dirty="0"/>
-          </a:p>
-          <a:p>
-            <a:r>
-              <a:rPr lang="en-US" b="1" dirty="0"/>
-              <a:t>Null Terminator Importance</a:t>
-            </a:r>
-          </a:p>
-          <a:p>
-            <a:r>
-              <a:rPr lang="en-US" dirty="0"/>
-              <a:t>This image displays a C source code snippet that contrasts incorrect and correct ways to initialize a character array for use as a string. </a:t>
-            </a:r>
-          </a:p>
-          <a:p>
-            <a:r>
-              <a:rPr lang="en-US" dirty="0"/>
-              <a:t>The code is written inside a </a:t>
+              <a:t>C-style strings are one-dimensional character arrays terminated by a null character (</a:t>
             </a:r>
             <a:r>
               <a:rPr lang="en-US" sz="1200" kern="1200" dirty="0">
@@ -3155,14 +3083,58 @@
                 <a:ea typeface="+mn-ea"/>
                 <a:cs typeface="+mn-cs"/>
               </a:rPr>
-              <a:t>main()</a:t>
+              <a:t>\0</a:t>
             </a:r>
             <a:r>
               <a:rPr lang="en-US" dirty="0"/>
-              <a:t> function and includes the </a:t>
-            </a:r>
-            <a:r>
-              <a:rPr lang="en-US" sz="1200" kern="1200" dirty="0">
+              <a:t>).</a:t>
+            </a:r>
+          </a:p>
+          <a:p>
+            <a:endParaRPr lang="en-US" dirty="0"/>
+          </a:p>
+          <a:p>
+            <a:r>
+              <a:rPr lang="en-US" b="1" dirty="0"/>
+              <a:t>Length</a:t>
+            </a:r>
+            <a:r>
+              <a:rPr lang="en-US" dirty="0"/>
+              <a:t>:</a:t>
+            </a:r>
+          </a:p>
+          <a:p>
+            <a:r>
+              <a:rPr lang="en-US" dirty="0"/>
+              <a:t>C does not explicitly store string length; </a:t>
+            </a:r>
+          </a:p>
+          <a:p>
+            <a:r>
+              <a:rPr lang="en-US" dirty="0"/>
+              <a:t>it relies on the null character as a "sentinel value".</a:t>
+            </a:r>
+          </a:p>
+          <a:p>
+            <a:endParaRPr lang="en-US" dirty="0"/>
+          </a:p>
+          <a:p>
+            <a:r>
+              <a:rPr lang="en-US" b="1" dirty="0"/>
+              <a:t>Functions</a:t>
+            </a:r>
+            <a:r>
+              <a:rPr lang="en-US" dirty="0"/>
+              <a:t>:</a:t>
+            </a:r>
+          </a:p>
+          <a:p>
+            <a:r>
+              <a:rPr lang="en-US" dirty="0"/>
+              <a:t>Standard functions like </a:t>
+            </a:r>
+            <a:r>
+              <a:rPr lang="en-US" sz="1200" b="1" kern="1200" dirty="0" err="1">
                 <a:solidFill>
                   <a:schemeClr val="tx1"/>
                 </a:solidFill>
@@ -3170,10 +3142,14 @@
                 <a:ea typeface="+mn-ea"/>
                 <a:cs typeface="+mn-cs"/>
               </a:rPr>
-              <a:t>&lt;</a:t>
-            </a:r>
-            <a:r>
-              <a:rPr lang="en-US" sz="1200" kern="1200" dirty="0" err="1">
+              <a:t>strcpy</a:t>
+            </a:r>
+            <a:r>
+              <a:rPr lang="en-US" dirty="0"/>
+              <a:t>, </a:t>
+            </a:r>
+            <a:r>
+              <a:rPr lang="en-US" sz="1200" b="1" kern="1200" dirty="0" err="1">
                 <a:solidFill>
                   <a:schemeClr val="tx1"/>
                 </a:solidFill>
@@ -3181,10 +3157,14 @@
                 <a:ea typeface="+mn-ea"/>
                 <a:cs typeface="+mn-cs"/>
               </a:rPr>
-              <a:t>stdio.h</a:t>
-            </a:r>
-            <a:r>
-              <a:rPr lang="en-US" sz="1200" kern="1200" dirty="0">
+              <a:t>strcat</a:t>
+            </a:r>
+            <a:r>
+              <a:rPr lang="en-US" dirty="0"/>
+              <a:t>, and </a:t>
+            </a:r>
+            <a:r>
+              <a:rPr lang="en-US" sz="1200" b="1" kern="1200" dirty="0" err="1">
                 <a:solidFill>
                   <a:schemeClr val="tx1"/>
                 </a:solidFill>
@@ -3192,203 +3172,15 @@
                 <a:ea typeface="+mn-ea"/>
                 <a:cs typeface="+mn-cs"/>
               </a:rPr>
-              <a:t>&gt;</a:t>
+              <a:t>strcmp</a:t>
             </a:r>
             <a:r>
               <a:rPr lang="en-US" dirty="0"/>
-              <a:t> library.</a:t>
+              <a:t> require the null terminator to function.</a:t>
             </a:r>
           </a:p>
           <a:p>
             <a:endParaRPr lang="en-US" dirty="0"/>
-          </a:p>
-          <a:p>
-            <a:r>
-              <a:rPr lang="en-US" b="1" dirty="0"/>
-              <a:t>The Problem (Undefined Behavior)</a:t>
-            </a:r>
-            <a:r>
-              <a:rPr lang="en-US" dirty="0"/>
-              <a:t>: </a:t>
-            </a:r>
-          </a:p>
-          <a:p>
-            <a:r>
-              <a:rPr lang="en-US" dirty="0"/>
-              <a:t>The first example declares a character array </a:t>
-            </a:r>
-            <a:r>
-              <a:rPr lang="en-US" sz="1200" kern="1200" dirty="0">
-                <a:solidFill>
-                  <a:schemeClr val="tx1"/>
-                </a:solidFill>
-                <a:latin typeface="+mn-lt"/>
-                <a:ea typeface="+mn-ea"/>
-                <a:cs typeface="+mn-cs"/>
-              </a:rPr>
-              <a:t>char str[5]</a:t>
-            </a:r>
-            <a:r>
-              <a:rPr lang="en-US" dirty="0"/>
-              <a:t> containing the characters </a:t>
-            </a:r>
-            <a:r>
-              <a:rPr lang="en-US" sz="1200" kern="1200" dirty="0">
-                <a:solidFill>
-                  <a:schemeClr val="tx1"/>
-                </a:solidFill>
-                <a:latin typeface="+mn-lt"/>
-                <a:ea typeface="+mn-ea"/>
-                <a:cs typeface="+mn-cs"/>
-              </a:rPr>
-              <a:t>'H', 'e', 'l', 'l', 'o’</a:t>
-            </a:r>
-            <a:r>
-              <a:rPr lang="en-US" dirty="0"/>
-              <a:t>. </a:t>
-            </a:r>
-          </a:p>
-          <a:p>
-            <a:r>
-              <a:rPr lang="en-US" dirty="0"/>
-              <a:t>A comment explicitly labels this as </a:t>
-            </a:r>
-            <a:r>
-              <a:rPr lang="en-US" b="1" dirty="0"/>
-              <a:t>"Undefined behavior"</a:t>
-            </a:r>
-            <a:r>
-              <a:rPr lang="en-US" dirty="0"/>
-              <a:t> because the array lacks a null terminator. </a:t>
-            </a:r>
-          </a:p>
-          <a:p>
-            <a:r>
-              <a:rPr lang="en-US" dirty="0"/>
-              <a:t>When </a:t>
-            </a:r>
-            <a:r>
-              <a:rPr lang="en-US" sz="1200" kern="1200" dirty="0" err="1">
-                <a:solidFill>
-                  <a:schemeClr val="tx1"/>
-                </a:solidFill>
-                <a:latin typeface="+mn-lt"/>
-                <a:ea typeface="+mn-ea"/>
-                <a:cs typeface="+mn-cs"/>
-              </a:rPr>
-              <a:t>printf</a:t>
-            </a:r>
-            <a:r>
-              <a:rPr lang="en-US" dirty="0"/>
-              <a:t> attempts to print this using </a:t>
-            </a:r>
-            <a:r>
-              <a:rPr lang="en-US" sz="1200" kern="1200" dirty="0">
-                <a:solidFill>
-                  <a:schemeClr val="tx1"/>
-                </a:solidFill>
-                <a:latin typeface="+mn-lt"/>
-                <a:ea typeface="+mn-ea"/>
-                <a:cs typeface="+mn-cs"/>
-              </a:rPr>
-              <a:t>%s</a:t>
-            </a:r>
-            <a:r>
-              <a:rPr lang="en-US" dirty="0"/>
-              <a:t>, it will continue reading past the end of the array into adjacent memory </a:t>
-            </a:r>
-          </a:p>
-          <a:p>
-            <a:r>
-              <a:rPr lang="en-US" dirty="0"/>
-              <a:t>until it happens to find a null byte, potentially causing a crash or displaying "garbage" data.</a:t>
-            </a:r>
-          </a:p>
-          <a:p>
-            <a:endParaRPr lang="en-US" dirty="0"/>
-          </a:p>
-          <a:p>
-            <a:r>
-              <a:rPr lang="en-US" b="1" dirty="0"/>
-              <a:t>The Solution (Safe Behavior)</a:t>
-            </a:r>
-            <a:r>
-              <a:rPr lang="en-US" dirty="0"/>
-              <a:t>: </a:t>
-            </a:r>
-          </a:p>
-          <a:p>
-            <a:r>
-              <a:rPr lang="en-US" dirty="0"/>
-              <a:t>The second example, shown in comments, demonstrates the correct approach: </a:t>
-            </a:r>
-            <a:r>
-              <a:rPr lang="en-US" sz="1200" kern="1200" dirty="0">
-                <a:solidFill>
-                  <a:schemeClr val="tx1"/>
-                </a:solidFill>
-                <a:latin typeface="+mn-lt"/>
-                <a:ea typeface="+mn-ea"/>
-                <a:cs typeface="+mn-cs"/>
-              </a:rPr>
-              <a:t>char str[6] = {'H', 'e', 'l', 'l', 'o', '\0’}</a:t>
-            </a:r>
-            <a:r>
-              <a:rPr lang="en-US" dirty="0"/>
-              <a:t>. </a:t>
-            </a:r>
-          </a:p>
-          <a:p>
-            <a:r>
-              <a:rPr lang="en-US" dirty="0"/>
-              <a:t>By increasing the array size to 6, the code accommodates the </a:t>
-            </a:r>
-            <a:r>
-              <a:rPr lang="en-US" b="1" dirty="0"/>
-              <a:t>null terminator (</a:t>
-            </a:r>
-            <a:r>
-              <a:rPr lang="en-US" sz="1200" b="1" kern="1200" dirty="0">
-                <a:solidFill>
-                  <a:schemeClr val="tx1"/>
-                </a:solidFill>
-                <a:latin typeface="+mn-lt"/>
-                <a:ea typeface="+mn-ea"/>
-                <a:cs typeface="+mn-cs"/>
-              </a:rPr>
-              <a:t>\0</a:t>
-            </a:r>
-            <a:r>
-              <a:rPr lang="en-US" b="1" dirty="0"/>
-              <a:t>)</a:t>
-            </a:r>
-            <a:r>
-              <a:rPr lang="en-US" dirty="0"/>
-              <a:t>. </a:t>
-            </a:r>
-          </a:p>
-          <a:p>
-            <a:r>
-              <a:rPr lang="en-US" dirty="0"/>
-              <a:t>A comment identifies this as </a:t>
-            </a:r>
-            <a:r>
-              <a:rPr lang="en-US" b="1" dirty="0"/>
-              <a:t>"Safe and predictable behavior"</a:t>
-            </a:r>
-            <a:r>
-              <a:rPr lang="en-US" dirty="0"/>
-              <a:t> </a:t>
-            </a:r>
-          </a:p>
-          <a:p>
-            <a:r>
-              <a:rPr lang="en-US" dirty="0"/>
-              <a:t>because the null terminator provides a clear "stop signal" for string-handling functions.</a:t>
-            </a:r>
-          </a:p>
-          <a:p>
-            <a:endParaRPr lang="en-US" b="1" dirty="0"/>
           </a:p>
         </p:txBody>
       </p:sp>
@@ -3409,7 +3201,7 @@
           <a:p>
             <a:fld id="{47C4BADD-04F7-41D2-9669-C72D2F0F5FAD}" type="slidenum">
               <a:rPr lang="en-US" smtClean="0"/>
-              <a:t>8</a:t>
+              <a:t>7</a:t>
             </a:fld>
             <a:endParaRPr lang="en-US"/>
           </a:p>
@@ -3418,7 +3210,7 @@
     </p:spTree>
     <p:extLst>
       <p:ext uri="{BB962C8B-B14F-4D97-AF65-F5344CB8AC3E}">
-        <p14:creationId xmlns:p14="http://schemas.microsoft.com/office/powerpoint/2010/main" val="2706355243"/>
+        <p14:creationId xmlns:p14="http://schemas.microsoft.com/office/powerpoint/2010/main" val="3978711689"/>
       </p:ext>
     </p:extLst>
   </p:cSld>
@@ -3474,26 +3266,52 @@
           <a:p>
             <a:r>
               <a:rPr lang="en-US" b="1" dirty="0"/>
-              <a:t>Dynamic Memory Allocation</a:t>
-            </a:r>
-          </a:p>
-          <a:p>
+              <a:t>Common Bugs - Null Bytes</a:t>
+            </a:r>
             <a:endParaRPr lang="en-US" dirty="0"/>
           </a:p>
           <a:p>
             <a:r>
               <a:rPr lang="en-US" b="1" dirty="0"/>
-              <a:t>Runtime Allocation</a:t>
+              <a:t>Risk</a:t>
             </a:r>
             <a:r>
               <a:rPr lang="en-US" dirty="0"/>
-              <a:t>: </a:t>
-            </a:r>
+              <a:t>: Failing to null-terminate a string can lead to printing "garbage" values or program crashes.</a:t>
+            </a:r>
+          </a:p>
+          <a:p>
+            <a:endParaRPr lang="en-US" dirty="0"/>
+          </a:p>
+          <a:p>
+            <a:r>
+              <a:rPr lang="en-US" b="1" dirty="0"/>
+              <a:t>See example:</a:t>
+            </a:r>
+          </a:p>
+          <a:p>
+            <a:r>
+              <a:rPr lang="en-US" dirty="0" err="1"/>
+              <a:t>hello_string.c</a:t>
+            </a:r>
+            <a:endParaRPr lang="en-US" dirty="0"/>
+          </a:p>
+          <a:p>
+            <a:endParaRPr lang="en-US" dirty="0"/>
+          </a:p>
+          <a:p>
+            <a:endParaRPr lang="en-US" dirty="0"/>
           </a:p>
           <a:p>
             <a:r>
               <a:rPr lang="en-US" dirty="0"/>
-              <a:t>Allows memory to be allocated during execution rather than at compile time.</a:t>
+              <a:t>---</a:t>
+            </a:r>
+          </a:p>
+          <a:p>
+            <a:r>
+              <a:rPr lang="en-US" b="1" dirty="0"/>
+              <a:t>Long-form Description:</a:t>
             </a:r>
           </a:p>
           <a:p>
@@ -3502,39 +3320,22 @@
           <a:p>
             <a:r>
               <a:rPr lang="en-US" b="1" dirty="0"/>
-              <a:t>Flexibility</a:t>
-            </a:r>
+              <a:t>Null Terminator Importance</a:t>
+            </a:r>
+          </a:p>
+          <a:p>
             <a:r>
               <a:rPr lang="en-US" dirty="0"/>
-              <a:t>: </a:t>
+              <a:t>This image displays a C source code snippet that contrasts incorrect and correct ways to initialize a character array for use as a string. </a:t>
             </a:r>
           </a:p>
           <a:p>
             <a:r>
               <a:rPr lang="en-US" dirty="0"/>
-              <a:t>Enables creating, resizing, and deallocating memory as needed.</a:t>
-            </a:r>
-          </a:p>
-          <a:p>
-            <a:endParaRPr lang="en-US" dirty="0"/>
-          </a:p>
-          <a:p>
-            <a:r>
-              <a:rPr lang="en-US" b="1" dirty="0"/>
-              <a:t>Operators (C vs. C++)</a:t>
-            </a:r>
-            <a:r>
-              <a:rPr lang="en-US" dirty="0"/>
-              <a:t>: </a:t>
-            </a:r>
-          </a:p>
-          <a:p>
-            <a:r>
-              <a:rPr lang="en-US" dirty="0"/>
-              <a:t>Use </a:t>
-            </a:r>
-            <a:r>
-              <a:rPr lang="en-US" sz="1200" b="1" kern="1200" dirty="0">
+              <a:t>The code is written inside a </a:t>
+            </a:r>
+            <a:r>
+              <a:rPr lang="en-US" sz="1200" kern="1200" dirty="0">
                 <a:solidFill>
                   <a:schemeClr val="tx1"/>
                 </a:solidFill>
@@ -3542,14 +3343,14 @@
                 <a:ea typeface="+mn-ea"/>
                 <a:cs typeface="+mn-cs"/>
               </a:rPr>
-              <a:t>malloc</a:t>
+              <a:t>main()</a:t>
             </a:r>
             <a:r>
               <a:rPr lang="en-US" dirty="0"/>
-              <a:t> and </a:t>
-            </a:r>
-            <a:r>
-              <a:rPr lang="en-US" sz="1200" b="1" kern="1200" dirty="0">
+              <a:t> function and includes the </a:t>
+            </a:r>
+            <a:r>
+              <a:rPr lang="en-US" sz="1200" kern="1200" dirty="0">
                 <a:solidFill>
                   <a:schemeClr val="tx1"/>
                 </a:solidFill>
@@ -3557,20 +3358,10 @@
                 <a:ea typeface="+mn-ea"/>
                 <a:cs typeface="+mn-cs"/>
               </a:rPr>
-              <a:t>free</a:t>
-            </a:r>
-            <a:r>
-              <a:rPr lang="en-US" dirty="0"/>
-              <a:t> in C; </a:t>
-            </a:r>
-          </a:p>
-          <a:p>
-            <a:r>
-              <a:rPr lang="en-US" dirty="0"/>
-              <a:t>Use </a:t>
-            </a:r>
-            <a:r>
-              <a:rPr lang="en-US" sz="1200" b="1" kern="1200" dirty="0">
+              <a:t>&lt;</a:t>
+            </a:r>
+            <a:r>
+              <a:rPr lang="en-US" sz="1200" kern="1200" dirty="0" err="1">
                 <a:solidFill>
                   <a:schemeClr val="tx1"/>
                 </a:solidFill>
@@ -3578,14 +3369,10 @@
                 <a:ea typeface="+mn-ea"/>
                 <a:cs typeface="+mn-cs"/>
               </a:rPr>
-              <a:t>new</a:t>
-            </a:r>
-            <a:r>
-              <a:rPr lang="en-US" dirty="0"/>
-              <a:t> and </a:t>
-            </a:r>
-            <a:r>
-              <a:rPr lang="en-US" sz="1200" b="1" kern="1200" dirty="0">
+              <a:t>stdio.h</a:t>
+            </a:r>
+            <a:r>
+              <a:rPr lang="en-US" sz="1200" kern="1200" dirty="0">
                 <a:solidFill>
                   <a:schemeClr val="tx1"/>
                 </a:solidFill>
@@ -3593,15 +3380,203 @@
                 <a:ea typeface="+mn-ea"/>
                 <a:cs typeface="+mn-cs"/>
               </a:rPr>
-              <a:t>delete</a:t>
+              <a:t>&gt;</a:t>
             </a:r>
             <a:r>
               <a:rPr lang="en-US" dirty="0"/>
-              <a:t> in C++.</a:t>
+              <a:t> library.</a:t>
             </a:r>
           </a:p>
           <a:p>
             <a:endParaRPr lang="en-US" dirty="0"/>
+          </a:p>
+          <a:p>
+            <a:r>
+              <a:rPr lang="en-US" b="1" dirty="0"/>
+              <a:t>The Problem (Undefined Behavior)</a:t>
+            </a:r>
+            <a:r>
+              <a:rPr lang="en-US" dirty="0"/>
+              <a:t>: </a:t>
+            </a:r>
+          </a:p>
+          <a:p>
+            <a:r>
+              <a:rPr lang="en-US" dirty="0"/>
+              <a:t>The first example declares a character array </a:t>
+            </a:r>
+            <a:r>
+              <a:rPr lang="en-US" sz="1200" kern="1200" dirty="0">
+                <a:solidFill>
+                  <a:schemeClr val="tx1"/>
+                </a:solidFill>
+                <a:latin typeface="+mn-lt"/>
+                <a:ea typeface="+mn-ea"/>
+                <a:cs typeface="+mn-cs"/>
+              </a:rPr>
+              <a:t>char str[5]</a:t>
+            </a:r>
+            <a:r>
+              <a:rPr lang="en-US" dirty="0"/>
+              <a:t> containing the characters </a:t>
+            </a:r>
+            <a:r>
+              <a:rPr lang="en-US" sz="1200" kern="1200" dirty="0">
+                <a:solidFill>
+                  <a:schemeClr val="tx1"/>
+                </a:solidFill>
+                <a:latin typeface="+mn-lt"/>
+                <a:ea typeface="+mn-ea"/>
+                <a:cs typeface="+mn-cs"/>
+              </a:rPr>
+              <a:t>'H', 'e', 'l', 'l', 'o’</a:t>
+            </a:r>
+            <a:r>
+              <a:rPr lang="en-US" dirty="0"/>
+              <a:t>. </a:t>
+            </a:r>
+          </a:p>
+          <a:p>
+            <a:r>
+              <a:rPr lang="en-US" dirty="0"/>
+              <a:t>A comment explicitly labels this as </a:t>
+            </a:r>
+            <a:r>
+              <a:rPr lang="en-US" b="1" dirty="0"/>
+              <a:t>"Undefined behavior"</a:t>
+            </a:r>
+            <a:r>
+              <a:rPr lang="en-US" dirty="0"/>
+              <a:t> because the array lacks a null terminator. </a:t>
+            </a:r>
+          </a:p>
+          <a:p>
+            <a:r>
+              <a:rPr lang="en-US" dirty="0"/>
+              <a:t>When </a:t>
+            </a:r>
+            <a:r>
+              <a:rPr lang="en-US" sz="1200" kern="1200" dirty="0" err="1">
+                <a:solidFill>
+                  <a:schemeClr val="tx1"/>
+                </a:solidFill>
+                <a:latin typeface="+mn-lt"/>
+                <a:ea typeface="+mn-ea"/>
+                <a:cs typeface="+mn-cs"/>
+              </a:rPr>
+              <a:t>printf</a:t>
+            </a:r>
+            <a:r>
+              <a:rPr lang="en-US" dirty="0"/>
+              <a:t> attempts to print this using </a:t>
+            </a:r>
+            <a:r>
+              <a:rPr lang="en-US" sz="1200" kern="1200" dirty="0">
+                <a:solidFill>
+                  <a:schemeClr val="tx1"/>
+                </a:solidFill>
+                <a:latin typeface="+mn-lt"/>
+                <a:ea typeface="+mn-ea"/>
+                <a:cs typeface="+mn-cs"/>
+              </a:rPr>
+              <a:t>%s</a:t>
+            </a:r>
+            <a:r>
+              <a:rPr lang="en-US" dirty="0"/>
+              <a:t>, it will continue reading past the end of the array into adjacent memory </a:t>
+            </a:r>
+          </a:p>
+          <a:p>
+            <a:r>
+              <a:rPr lang="en-US" dirty="0"/>
+              <a:t>until it happens to find a null byte, potentially causing a crash or displaying "garbage" data.</a:t>
+            </a:r>
+          </a:p>
+          <a:p>
+            <a:endParaRPr lang="en-US" dirty="0"/>
+          </a:p>
+          <a:p>
+            <a:r>
+              <a:rPr lang="en-US" b="1" dirty="0"/>
+              <a:t>The Solution (Safe Behavior)</a:t>
+            </a:r>
+            <a:r>
+              <a:rPr lang="en-US" dirty="0"/>
+              <a:t>: </a:t>
+            </a:r>
+          </a:p>
+          <a:p>
+            <a:r>
+              <a:rPr lang="en-US" dirty="0"/>
+              <a:t>The second example, shown in comments, demonstrates the correct approach: </a:t>
+            </a:r>
+            <a:r>
+              <a:rPr lang="en-US" sz="1200" kern="1200" dirty="0">
+                <a:solidFill>
+                  <a:schemeClr val="tx1"/>
+                </a:solidFill>
+                <a:latin typeface="+mn-lt"/>
+                <a:ea typeface="+mn-ea"/>
+                <a:cs typeface="+mn-cs"/>
+              </a:rPr>
+              <a:t>char str[6] = {'H', 'e', 'l', 'l', 'o', '\0’}</a:t>
+            </a:r>
+            <a:r>
+              <a:rPr lang="en-US" dirty="0"/>
+              <a:t>. </a:t>
+            </a:r>
+          </a:p>
+          <a:p>
+            <a:r>
+              <a:rPr lang="en-US" dirty="0"/>
+              <a:t>By increasing the array size to 6, the code accommodates the </a:t>
+            </a:r>
+            <a:r>
+              <a:rPr lang="en-US" b="1" dirty="0"/>
+              <a:t>null terminator (</a:t>
+            </a:r>
+            <a:r>
+              <a:rPr lang="en-US" sz="1200" b="1" kern="1200" dirty="0">
+                <a:solidFill>
+                  <a:schemeClr val="tx1"/>
+                </a:solidFill>
+                <a:latin typeface="+mn-lt"/>
+                <a:ea typeface="+mn-ea"/>
+                <a:cs typeface="+mn-cs"/>
+              </a:rPr>
+              <a:t>\0</a:t>
+            </a:r>
+            <a:r>
+              <a:rPr lang="en-US" b="1" dirty="0"/>
+              <a:t>)</a:t>
+            </a:r>
+            <a:r>
+              <a:rPr lang="en-US" dirty="0"/>
+              <a:t>. </a:t>
+            </a:r>
+          </a:p>
+          <a:p>
+            <a:r>
+              <a:rPr lang="en-US" dirty="0"/>
+              <a:t>A comment identifies this as </a:t>
+            </a:r>
+            <a:r>
+              <a:rPr lang="en-US" b="1" dirty="0"/>
+              <a:t>"Safe and predictable behavior"</a:t>
+            </a:r>
+            <a:r>
+              <a:rPr lang="en-US" dirty="0"/>
+              <a:t> </a:t>
+            </a:r>
+          </a:p>
+          <a:p>
+            <a:r>
+              <a:rPr lang="en-US" dirty="0"/>
+              <a:t>because the null terminator provides a clear "stop signal" for string-handling functions.</a:t>
+            </a:r>
+          </a:p>
+          <a:p>
+            <a:endParaRPr lang="en-US" b="1" dirty="0"/>
           </a:p>
         </p:txBody>
       </p:sp>
@@ -3622,7 +3597,7 @@
           <a:p>
             <a:fld id="{47C4BADD-04F7-41D2-9669-C72D2F0F5FAD}" type="slidenum">
               <a:rPr lang="en-US" smtClean="0"/>
-              <a:t>9</a:t>
+              <a:t>8</a:t>
             </a:fld>
             <a:endParaRPr lang="en-US"/>
           </a:p>
@@ -3631,7 +3606,7 @@
     </p:spTree>
     <p:extLst>
       <p:ext uri="{BB962C8B-B14F-4D97-AF65-F5344CB8AC3E}">
-        <p14:creationId xmlns:p14="http://schemas.microsoft.com/office/powerpoint/2010/main" val="1855305028"/>
+        <p14:creationId xmlns:p14="http://schemas.microsoft.com/office/powerpoint/2010/main" val="2706355243"/>
       </p:ext>
     </p:extLst>
   </p:cSld>
@@ -3686,6 +3661,67 @@
           <a:lstStyle/>
           <a:p>
             <a:r>
+              <a:rPr lang="en-US" b="1" dirty="0"/>
+              <a:t>Dynamic Memory Allocation</a:t>
+            </a:r>
+          </a:p>
+          <a:p>
+            <a:endParaRPr lang="en-US" dirty="0"/>
+          </a:p>
+          <a:p>
+            <a:r>
+              <a:rPr lang="en-US" b="1" dirty="0"/>
+              <a:t>Runtime Allocation</a:t>
+            </a:r>
+            <a:r>
+              <a:rPr lang="en-US" dirty="0"/>
+              <a:t>: </a:t>
+            </a:r>
+          </a:p>
+          <a:p>
+            <a:r>
+              <a:rPr lang="en-US" dirty="0"/>
+              <a:t>Allows memory to be allocated during execution rather than at compile time.</a:t>
+            </a:r>
+          </a:p>
+          <a:p>
+            <a:endParaRPr lang="en-US" dirty="0"/>
+          </a:p>
+          <a:p>
+            <a:r>
+              <a:rPr lang="en-US" b="1" dirty="0"/>
+              <a:t>Flexibility</a:t>
+            </a:r>
+            <a:r>
+              <a:rPr lang="en-US" dirty="0"/>
+              <a:t>: </a:t>
+            </a:r>
+          </a:p>
+          <a:p>
+            <a:r>
+              <a:rPr lang="en-US" dirty="0"/>
+              <a:t>Enables creating, resizing, and deallocating memory as needed.</a:t>
+            </a:r>
+          </a:p>
+          <a:p>
+            <a:endParaRPr lang="en-US" dirty="0"/>
+          </a:p>
+          <a:p>
+            <a:r>
+              <a:rPr lang="en-US" b="1" dirty="0"/>
+              <a:t>Operators (C vs. C++)</a:t>
+            </a:r>
+            <a:r>
+              <a:rPr lang="en-US" dirty="0"/>
+              <a:t>: </a:t>
+            </a:r>
+          </a:p>
+          <a:p>
+            <a:r>
+              <a:rPr lang="en-US" dirty="0"/>
+              <a:t>Use </a:t>
+            </a:r>
+            <a:r>
               <a:rPr lang="en-US" sz="1200" b="1" kern="1200" dirty="0">
                 <a:solidFill>
                   <a:schemeClr val="tx1"/>
@@ -3694,12 +3730,66 @@
                 <a:ea typeface="+mn-ea"/>
                 <a:cs typeface="+mn-cs"/>
               </a:rPr>
-              <a:t>malloc()</a:t>
+              <a:t>malloc</a:t>
             </a:r>
             <a:r>
               <a:rPr lang="en-US" dirty="0"/>
-              <a:t>: Allocates a specific number of bytes.</a:t>
-            </a:r>
+              <a:t> and </a:t>
+            </a:r>
+            <a:r>
+              <a:rPr lang="en-US" sz="1200" b="1" kern="1200" dirty="0">
+                <a:solidFill>
+                  <a:schemeClr val="tx1"/>
+                </a:solidFill>
+                <a:latin typeface="+mn-lt"/>
+                <a:ea typeface="+mn-ea"/>
+                <a:cs typeface="+mn-cs"/>
+              </a:rPr>
+              <a:t>free</a:t>
+            </a:r>
+            <a:r>
+              <a:rPr lang="en-US" dirty="0"/>
+              <a:t> in C; </a:t>
+            </a:r>
+          </a:p>
+          <a:p>
+            <a:r>
+              <a:rPr lang="en-US" dirty="0"/>
+              <a:t>Use </a:t>
+            </a:r>
+            <a:r>
+              <a:rPr lang="en-US" sz="1200" b="1" kern="1200" dirty="0">
+                <a:solidFill>
+                  <a:schemeClr val="tx1"/>
+                </a:solidFill>
+                <a:latin typeface="+mn-lt"/>
+                <a:ea typeface="+mn-ea"/>
+                <a:cs typeface="+mn-cs"/>
+              </a:rPr>
+              <a:t>new</a:t>
+            </a:r>
+            <a:r>
+              <a:rPr lang="en-US" dirty="0"/>
+              <a:t> and </a:t>
+            </a:r>
+            <a:r>
+              <a:rPr lang="en-US" sz="1200" b="1" kern="1200" dirty="0">
+                <a:solidFill>
+                  <a:schemeClr val="tx1"/>
+                </a:solidFill>
+                <a:latin typeface="+mn-lt"/>
+                <a:ea typeface="+mn-ea"/>
+                <a:cs typeface="+mn-cs"/>
+              </a:rPr>
+              <a:t>delete</a:t>
+            </a:r>
+            <a:r>
+              <a:rPr lang="en-US" dirty="0"/>
+              <a:t> in C++.</a:t>
+            </a:r>
+          </a:p>
+          <a:p>
+            <a:endParaRPr lang="en-US" dirty="0"/>
           </a:p>
         </p:txBody>
       </p:sp>
@@ -3720,7 +3810,7 @@
           <a:p>
             <a:fld id="{47C4BADD-04F7-41D2-9669-C72D2F0F5FAD}" type="slidenum">
               <a:rPr lang="en-US" smtClean="0"/>
-              <a:t>10</a:t>
+              <a:t>9</a:t>
             </a:fld>
             <a:endParaRPr lang="en-US"/>
           </a:p>
@@ -3729,7 +3819,7 @@
     </p:spTree>
     <p:extLst>
       <p:ext uri="{BB962C8B-B14F-4D97-AF65-F5344CB8AC3E}">
-        <p14:creationId xmlns:p14="http://schemas.microsoft.com/office/powerpoint/2010/main" val="671057026"/>
+        <p14:creationId xmlns:p14="http://schemas.microsoft.com/office/powerpoint/2010/main" val="1855305028"/>
       </p:ext>
     </p:extLst>
   </p:cSld>
@@ -14529,6 +14619,16 @@
                 <a:cs typeface="Arial MT"/>
               </a:rPr>
               <a:t> </a:t>
+            </a:r>
+            <a:r>
+              <a:rPr lang="en-US" sz="2000" spc="-25" dirty="0">
+                <a:solidFill>
+                  <a:srgbClr val="0F2044"/>
+                </a:solidFill>
+                <a:latin typeface="Arial MT"/>
+                <a:cs typeface="Arial MT"/>
+              </a:rPr>
+              <a:t>C/</a:t>
             </a:r>
             <a:r>
               <a:rPr sz="2000" dirty="0">
